--- a/entregaveis/apresentacao_executiva_tcc.pptx
+++ b/entregaveis/apresentacao_executiva_tcc.pptx
@@ -15,7 +15,6 @@
     <p:sldId id="263" r:id="rId14"/>
     <p:sldId id="264" r:id="rId15"/>
     <p:sldId id="265" r:id="rId16"/>
-    <p:sldId id="266" r:id="rId17"/>
   </p:sldIdLst>
   <p:sldSz cx="12188952" cy="6858000" type="screen4x3"/>
   <p:notesSz cx="6858000" cy="9144000"/>
@@ -3852,650 +3851,6 @@
         <p:spPr>
           <a:xfrm>
             <a:off x="0" y="0"/>
-            <a:ext cx="12188952" cy="960120"/>
-          </a:xfrm>
-          <a:prstGeom prst="rect">
-            <a:avLst/>
-          </a:prstGeom>
-          <a:solidFill>
-            <a:srgbClr val="1F3864"/>
-          </a:solidFill>
-          <a:ln/>
-        </p:spPr>
-        <p:style>
-          <a:lnRef idx="1">
-            <a:schemeClr val="accent1"/>
-          </a:lnRef>
-          <a:fillRef idx="3">
-            <a:schemeClr val="accent1"/>
-          </a:fillRef>
-          <a:effectRef idx="2">
-            <a:schemeClr val="accent1"/>
-          </a:effectRef>
-          <a:fontRef idx="minor">
-            <a:schemeClr val="lt1"/>
-          </a:fontRef>
-        </p:style>
-        <p:txBody>
-          <a:bodyPr rtlCol="0" anchor="ctr"/>
-          <a:lstStyle/>
-          <a:p>
-            <a:pPr algn="ctr"/>
-          </a:p>
-        </p:txBody>
-      </p:sp>
-      <p:sp>
-        <p:nvSpPr>
-          <p:cNvPr id="3" name="TextBox 2"/>
-          <p:cNvSpPr txBox="1"/>
-          <p:nvPr/>
-        </p:nvSpPr>
-        <p:spPr>
-          <a:xfrm>
-            <a:off x="320040" y="64008"/>
-            <a:ext cx="11430000" cy="502920"/>
-          </a:xfrm>
-          <a:prstGeom prst="rect">
-            <a:avLst/>
-          </a:prstGeom>
-          <a:noFill/>
-        </p:spPr>
-        <p:txBody>
-          <a:bodyPr wrap="square">
-            <a:spAutoFit/>
-          </a:bodyPr>
-          <a:lstStyle/>
-          <a:p>
-            <a:pPr algn="l"/>
-            <a:r>
-              <a:rPr sz="2700" b="1" i="0">
-                <a:solidFill>
-                  <a:srgbClr val="FFFFFF"/>
-                </a:solidFill>
-                <a:latin typeface="Calibri"/>
-              </a:rPr>
-              <a:t>9. Interseccionalidade — O Teto de Vidro Recai sobre a Mulher Negra</a:t>
-            </a:r>
-          </a:p>
-        </p:txBody>
-      </p:sp>
-      <p:sp>
-        <p:nvSpPr>
-          <p:cNvPr id="4" name="TextBox 3"/>
-          <p:cNvSpPr txBox="1"/>
-          <p:nvPr/>
-        </p:nvSpPr>
-        <p:spPr>
-          <a:xfrm>
-            <a:off x="320040" y="576072"/>
-            <a:ext cx="11430000" cy="320040"/>
-          </a:xfrm>
-          <a:prstGeom prst="rect">
-            <a:avLst/>
-          </a:prstGeom>
-          <a:noFill/>
-        </p:spPr>
-        <p:txBody>
-          <a:bodyPr wrap="square">
-            <a:spAutoFit/>
-          </a:bodyPr>
-          <a:lstStyle/>
-          <a:p>
-            <a:pPr algn="l"/>
-            <a:r>
-              <a:rPr sz="1350" b="0" i="0">
-                <a:solidFill>
-                  <a:srgbClr val="BBDEFB"/>
-                </a:solidFill>
-                <a:latin typeface="Calibri"/>
-              </a:rPr>
-              <a:t>4 grupos raca x genero (ref. homem branco): alcada no acesso, a mais excluida no topo da renda</a:t>
-            </a:r>
-          </a:p>
-        </p:txBody>
-      </p:sp>
-      <p:pic>
-        <p:nvPicPr>
-          <p:cNvPr id="5" name="Picture 4" descr="grupo_rg_interseccional.png"/>
-          <p:cNvPicPr>
-            <a:picLocks noChangeAspect="1"/>
-          </p:cNvPicPr>
-          <p:nvPr/>
-        </p:nvPicPr>
-        <p:blipFill>
-          <a:blip r:embed="rId2"/>
-          <a:stretch>
-            <a:fillRect/>
-          </a:stretch>
-        </p:blipFill>
-        <p:spPr>
-          <a:xfrm>
-            <a:off x="365760" y="1188720"/>
-            <a:ext cx="6949440" cy="4595360"/>
-          </a:xfrm>
-          <a:prstGeom prst="rect">
-            <a:avLst/>
-          </a:prstGeom>
-        </p:spPr>
-      </p:pic>
-      <p:sp>
-        <p:nvSpPr>
-          <p:cNvPr id="6" name="Rectangle 5"/>
-          <p:cNvSpPr/>
-          <p:nvPr/>
-        </p:nvSpPr>
-        <p:spPr>
-          <a:xfrm>
-            <a:off x="7589520" y="1371600"/>
-            <a:ext cx="4206240" cy="1645920"/>
-          </a:xfrm>
-          <a:prstGeom prst="rect">
-            <a:avLst/>
-          </a:prstGeom>
-          <a:solidFill>
-            <a:srgbClr val="0D1F3C"/>
-          </a:solidFill>
-          <a:ln w="19050">
-            <a:solidFill>
-              <a:srgbClr val="FF8F00"/>
-            </a:solidFill>
-          </a:ln>
-        </p:spPr>
-        <p:style>
-          <a:lnRef idx="1">
-            <a:schemeClr val="accent1"/>
-          </a:lnRef>
-          <a:fillRef idx="3">
-            <a:schemeClr val="accent1"/>
-          </a:fillRef>
-          <a:effectRef idx="2">
-            <a:schemeClr val="accent1"/>
-          </a:effectRef>
-          <a:fontRef idx="minor">
-            <a:schemeClr val="lt1"/>
-          </a:fontRef>
-        </p:style>
-        <p:txBody>
-          <a:bodyPr rtlCol="0" anchor="ctr"/>
-          <a:lstStyle/>
-          <a:p>
-            <a:pPr algn="ctr"/>
-          </a:p>
-        </p:txBody>
-      </p:sp>
-      <p:sp>
-        <p:nvSpPr>
-          <p:cNvPr id="7" name="TextBox 6"/>
-          <p:cNvSpPr txBox="1"/>
-          <p:nvPr/>
-        </p:nvSpPr>
-        <p:spPr>
-          <a:xfrm>
-            <a:off x="7699248" y="1444752"/>
-            <a:ext cx="3986784" cy="347472"/>
-          </a:xfrm>
-          <a:prstGeom prst="rect">
-            <a:avLst/>
-          </a:prstGeom>
-          <a:noFill/>
-        </p:spPr>
-        <p:txBody>
-          <a:bodyPr wrap="square">
-            <a:spAutoFit/>
-          </a:bodyPr>
-          <a:lstStyle/>
-          <a:p>
-            <a:pPr algn="l"/>
-            <a:r>
-              <a:rPr sz="1200" b="0" i="0">
-                <a:solidFill>
-                  <a:srgbClr val="BBDEFB"/>
-                </a:solidFill>
-                <a:latin typeface="Calibri"/>
-              </a:rPr>
-              <a:t>Mulher negra — acesso (CBO 1-4)</a:t>
-            </a:r>
-          </a:p>
-        </p:txBody>
-      </p:sp>
-      <p:sp>
-        <p:nvSpPr>
-          <p:cNvPr id="8" name="TextBox 7"/>
-          <p:cNvSpPr txBox="1"/>
-          <p:nvPr/>
-        </p:nvSpPr>
-        <p:spPr>
-          <a:xfrm>
-            <a:off x="7699248" y="1755648"/>
-            <a:ext cx="3986784" cy="777240"/>
-          </a:xfrm>
-          <a:prstGeom prst="rect">
-            <a:avLst/>
-          </a:prstGeom>
-          <a:noFill/>
-        </p:spPr>
-        <p:txBody>
-          <a:bodyPr wrap="square">
-            <a:spAutoFit/>
-          </a:bodyPr>
-          <a:lstStyle/>
-          <a:p>
-            <a:pPr algn="ctr"/>
-            <a:r>
-              <a:rPr sz="3600" b="1" i="0">
-                <a:solidFill>
-                  <a:srgbClr val="1565C0"/>
-                </a:solidFill>
-                <a:latin typeface="Calibri"/>
-              </a:rPr>
-              <a:t>OR 1,33</a:t>
-            </a:r>
-          </a:p>
-        </p:txBody>
-      </p:sp>
-      <p:sp>
-        <p:nvSpPr>
-          <p:cNvPr id="9" name="TextBox 8"/>
-          <p:cNvSpPr txBox="1"/>
-          <p:nvPr/>
-        </p:nvSpPr>
-        <p:spPr>
-          <a:xfrm>
-            <a:off x="7699248" y="2560320"/>
-            <a:ext cx="3986784" cy="347472"/>
-          </a:xfrm>
-          <a:prstGeom prst="rect">
-            <a:avLst/>
-          </a:prstGeom>
-          <a:noFill/>
-        </p:spPr>
-        <p:txBody>
-          <a:bodyPr wrap="square">
-            <a:spAutoFit/>
-          </a:bodyPr>
-          <a:lstStyle/>
-          <a:p>
-            <a:pPr algn="l"/>
-            <a:r>
-              <a:rPr sz="1000" b="0" i="1">
-                <a:solidFill>
-                  <a:srgbClr val="616161"/>
-                </a:solidFill>
-                <a:latin typeface="Calibri"/>
-              </a:rPr>
-              <a:t>acima do homem branco (profissoes feminizadas)</a:t>
-            </a:r>
-          </a:p>
-        </p:txBody>
-      </p:sp>
-      <p:sp>
-        <p:nvSpPr>
-          <p:cNvPr id="10" name="Rectangle 9"/>
-          <p:cNvSpPr/>
-          <p:nvPr/>
-        </p:nvSpPr>
-        <p:spPr>
-          <a:xfrm>
-            <a:off x="7589520" y="3291840"/>
-            <a:ext cx="4206240" cy="1645920"/>
-          </a:xfrm>
-          <a:prstGeom prst="rect">
-            <a:avLst/>
-          </a:prstGeom>
-          <a:solidFill>
-            <a:srgbClr val="0D1F3C"/>
-          </a:solidFill>
-          <a:ln w="19050">
-            <a:solidFill>
-              <a:srgbClr val="FF8F00"/>
-            </a:solidFill>
-          </a:ln>
-        </p:spPr>
-        <p:style>
-          <a:lnRef idx="1">
-            <a:schemeClr val="accent1"/>
-          </a:lnRef>
-          <a:fillRef idx="3">
-            <a:schemeClr val="accent1"/>
-          </a:fillRef>
-          <a:effectRef idx="2">
-            <a:schemeClr val="accent1"/>
-          </a:effectRef>
-          <a:fontRef idx="minor">
-            <a:schemeClr val="lt1"/>
-          </a:fontRef>
-        </p:style>
-        <p:txBody>
-          <a:bodyPr rtlCol="0" anchor="ctr"/>
-          <a:lstStyle/>
-          <a:p>
-            <a:pPr algn="ctr"/>
-          </a:p>
-        </p:txBody>
-      </p:sp>
-      <p:sp>
-        <p:nvSpPr>
-          <p:cNvPr id="11" name="TextBox 10"/>
-          <p:cNvSpPr txBox="1"/>
-          <p:nvPr/>
-        </p:nvSpPr>
-        <p:spPr>
-          <a:xfrm>
-            <a:off x="7699248" y="3364992"/>
-            <a:ext cx="3986784" cy="347472"/>
-          </a:xfrm>
-          <a:prstGeom prst="rect">
-            <a:avLst/>
-          </a:prstGeom>
-          <a:noFill/>
-        </p:spPr>
-        <p:txBody>
-          <a:bodyPr wrap="square">
-            <a:spAutoFit/>
-          </a:bodyPr>
-          <a:lstStyle/>
-          <a:p>
-            <a:pPr algn="l"/>
-            <a:r>
-              <a:rPr sz="1200" b="0" i="0">
-                <a:solidFill>
-                  <a:srgbClr val="BBDEFB"/>
-                </a:solidFill>
-                <a:latin typeface="Calibri"/>
-              </a:rPr>
-              <a:t>Mulher negra — topo 10% renda</a:t>
-            </a:r>
-          </a:p>
-        </p:txBody>
-      </p:sp>
-      <p:sp>
-        <p:nvSpPr>
-          <p:cNvPr id="12" name="TextBox 11"/>
-          <p:cNvSpPr txBox="1"/>
-          <p:nvPr/>
-        </p:nvSpPr>
-        <p:spPr>
-          <a:xfrm>
-            <a:off x="7699248" y="3675888"/>
-            <a:ext cx="3986784" cy="777240"/>
-          </a:xfrm>
-          <a:prstGeom prst="rect">
-            <a:avLst/>
-          </a:prstGeom>
-          <a:noFill/>
-        </p:spPr>
-        <p:txBody>
-          <a:bodyPr wrap="square">
-            <a:spAutoFit/>
-          </a:bodyPr>
-          <a:lstStyle/>
-          <a:p>
-            <a:pPr algn="ctr"/>
-            <a:r>
-              <a:rPr sz="3600" b="1" i="0">
-                <a:solidFill>
-                  <a:srgbClr val="B71C1C"/>
-                </a:solidFill>
-                <a:latin typeface="Calibri"/>
-              </a:rPr>
-              <a:t>OR 0,34</a:t>
-            </a:r>
-          </a:p>
-        </p:txBody>
-      </p:sp>
-      <p:sp>
-        <p:nvSpPr>
-          <p:cNvPr id="13" name="TextBox 12"/>
-          <p:cNvSpPr txBox="1"/>
-          <p:nvPr/>
-        </p:nvSpPr>
-        <p:spPr>
-          <a:xfrm>
-            <a:off x="7699248" y="4480560"/>
-            <a:ext cx="3986784" cy="347472"/>
-          </a:xfrm>
-          <a:prstGeom prst="rect">
-            <a:avLst/>
-          </a:prstGeom>
-          <a:noFill/>
-        </p:spPr>
-        <p:txBody>
-          <a:bodyPr wrap="square">
-            <a:spAutoFit/>
-          </a:bodyPr>
-          <a:lstStyle/>
-          <a:p>
-            <a:pPr algn="l"/>
-            <a:r>
-              <a:rPr sz="1000" b="0" i="1">
-                <a:solidFill>
-                  <a:srgbClr val="616161"/>
-                </a:solidFill>
-                <a:latin typeface="Calibri"/>
-              </a:rPr>
-              <a:t>a MAIS excluida de todos os grupos</a:t>
-            </a:r>
-          </a:p>
-        </p:txBody>
-      </p:sp>
-      <p:sp>
-        <p:nvSpPr>
-          <p:cNvPr id="14" name="Rectangle 13"/>
-          <p:cNvSpPr/>
-          <p:nvPr/>
-        </p:nvSpPr>
-        <p:spPr>
-          <a:xfrm>
-            <a:off x="365760" y="5897880"/>
-            <a:ext cx="11430000" cy="566928"/>
-          </a:xfrm>
-          <a:prstGeom prst="rect">
-            <a:avLst/>
-          </a:prstGeom>
-          <a:solidFill>
-            <a:srgbClr val="E3F2FD"/>
-          </a:solidFill>
-          <a:ln w="10160">
-            <a:solidFill>
-              <a:srgbClr val="1F3864"/>
-            </a:solidFill>
-          </a:ln>
-        </p:spPr>
-        <p:style>
-          <a:lnRef idx="1">
-            <a:schemeClr val="accent1"/>
-          </a:lnRef>
-          <a:fillRef idx="3">
-            <a:schemeClr val="accent1"/>
-          </a:fillRef>
-          <a:effectRef idx="2">
-            <a:schemeClr val="accent1"/>
-          </a:effectRef>
-          <a:fontRef idx="minor">
-            <a:schemeClr val="lt1"/>
-          </a:fontRef>
-        </p:style>
-        <p:txBody>
-          <a:bodyPr rtlCol="0" anchor="ctr"/>
-          <a:lstStyle/>
-          <a:p>
-            <a:pPr algn="ctr"/>
-          </a:p>
-        </p:txBody>
-      </p:sp>
-      <p:sp>
-        <p:nvSpPr>
-          <p:cNvPr id="15" name="TextBox 14"/>
-          <p:cNvSpPr txBox="1"/>
-          <p:nvPr/>
-        </p:nvSpPr>
-        <p:spPr>
-          <a:xfrm>
-            <a:off x="548640" y="5943600"/>
-            <a:ext cx="11064240" cy="475488"/>
-          </a:xfrm>
-          <a:prstGeom prst="rect">
-            <a:avLst/>
-          </a:prstGeom>
-          <a:noFill/>
-        </p:spPr>
-        <p:txBody>
-          <a:bodyPr wrap="square">
-            <a:spAutoFit/>
-          </a:bodyPr>
-          <a:lstStyle/>
-          <a:p>
-            <a:pPr algn="ctr"/>
-            <a:r>
-              <a:rPr sz="1200" b="1" i="0">
-                <a:solidFill>
-                  <a:srgbClr val="1F3864"/>
-                </a:solidFill>
-                <a:latin typeface="Calibri"/>
-              </a:rPr>
-              <a:t>A mulher negra pode ENTRAR em ocupacoes qualificadas, mas e barrada de CHEGAR AO TOPO da remuneracao: o teto de vidro nao e racial nem sexualmente neutro — combina os dois eixos onde mais importa.</a:t>
-            </a:r>
-          </a:p>
-        </p:txBody>
-      </p:sp>
-      <p:sp>
-        <p:nvSpPr>
-          <p:cNvPr id="16" name="Rectangle 15"/>
-          <p:cNvSpPr/>
-          <p:nvPr/>
-        </p:nvSpPr>
-        <p:spPr>
-          <a:xfrm>
-            <a:off x="0" y="6601968"/>
-            <a:ext cx="12188952" cy="256032"/>
-          </a:xfrm>
-          <a:prstGeom prst="rect">
-            <a:avLst/>
-          </a:prstGeom>
-          <a:solidFill>
-            <a:srgbClr val="1F3864"/>
-          </a:solidFill>
-          <a:ln/>
-        </p:spPr>
-        <p:style>
-          <a:lnRef idx="1">
-            <a:schemeClr val="accent1"/>
-          </a:lnRef>
-          <a:fillRef idx="3">
-            <a:schemeClr val="accent1"/>
-          </a:fillRef>
-          <a:effectRef idx="2">
-            <a:schemeClr val="accent1"/>
-          </a:effectRef>
-          <a:fontRef idx="minor">
-            <a:schemeClr val="lt1"/>
-          </a:fontRef>
-        </p:style>
-        <p:txBody>
-          <a:bodyPr rtlCol="0" anchor="ctr"/>
-          <a:lstStyle/>
-          <a:p>
-            <a:pPr algn="ctr"/>
-          </a:p>
-        </p:txBody>
-      </p:sp>
-      <p:sp>
-        <p:nvSpPr>
-          <p:cNvPr id="17" name="TextBox 16"/>
-          <p:cNvSpPr txBox="1"/>
-          <p:nvPr/>
-        </p:nvSpPr>
-        <p:spPr>
-          <a:xfrm>
-            <a:off x="137160" y="6629400"/>
-            <a:ext cx="10515600" cy="228600"/>
-          </a:xfrm>
-          <a:prstGeom prst="rect">
-            <a:avLst/>
-          </a:prstGeom>
-          <a:noFill/>
-        </p:spPr>
-        <p:txBody>
-          <a:bodyPr wrap="square">
-            <a:spAutoFit/>
-          </a:bodyPr>
-          <a:lstStyle/>
-          <a:p>
-            <a:pPr algn="l"/>
-            <a:r>
-              <a:rPr sz="800" b="0" i="0">
-                <a:solidFill>
-                  <a:srgbClr val="BBDEFB"/>
-                </a:solidFill>
-                <a:latin typeface="Calibri"/>
-              </a:rPr>
-              <a:t>Ricardo Calheiros  |  MBA USP/ESALQ  |  Racismo Estrutural e Mercado de Trabalho  |  Versao Executiva</a:t>
-            </a:r>
-          </a:p>
-        </p:txBody>
-      </p:sp>
-      <p:sp>
-        <p:nvSpPr>
-          <p:cNvPr id="18" name="TextBox 17"/>
-          <p:cNvSpPr txBox="1"/>
-          <p:nvPr/>
-        </p:nvSpPr>
-        <p:spPr>
-          <a:xfrm>
-            <a:off x="11612880" y="6629400"/>
-            <a:ext cx="457200" cy="228600"/>
-          </a:xfrm>
-          <a:prstGeom prst="rect">
-            <a:avLst/>
-          </a:prstGeom>
-          <a:noFill/>
-        </p:spPr>
-        <p:txBody>
-          <a:bodyPr wrap="square">
-            <a:spAutoFit/>
-          </a:bodyPr>
-          <a:lstStyle/>
-          <a:p>
-            <a:pPr algn="r"/>
-            <a:r>
-              <a:rPr sz="800" b="0" i="0">
-                <a:solidFill>
-                  <a:srgbClr val="FFFFFF"/>
-                </a:solidFill>
-                <a:latin typeface="Calibri"/>
-              </a:rPr>
-              <a:t>10/11</a:t>
-            </a:r>
-          </a:p>
-        </p:txBody>
-      </p:sp>
-    </p:spTree>
-  </p:cSld>
-  <p:clrMapOvr>
-    <a:masterClrMapping/>
-  </p:clrMapOvr>
-</p:sld>
-</file>
-
-<file path=ppt/slides/slide11.xml><?xml version="1.0" encoding="utf-8"?>
-<p:sld xmlns:a="http://schemas.openxmlformats.org/drawingml/2006/main" xmlns:p="http://schemas.openxmlformats.org/presentationml/2006/main" xmlns:r="http://schemas.openxmlformats.org/officeDocument/2006/relationships">
-  <p:cSld>
-    <p:spTree>
-      <p:nvGrpSpPr>
-        <p:cNvPr id="1" name=""/>
-        <p:cNvGrpSpPr/>
-        <p:nvPr/>
-      </p:nvGrpSpPr>
-      <p:grpSpPr/>
-      <p:sp>
-        <p:nvSpPr>
-          <p:cNvPr id="2" name="Rectangle 1"/>
-          <p:cNvSpPr/>
-          <p:nvPr/>
-        </p:nvSpPr>
-        <p:spPr>
-          <a:xfrm>
-            <a:off x="0" y="0"/>
             <a:ext cx="12188952" cy="6858000"/>
           </a:xfrm>
           <a:prstGeom prst="rect">
@@ -5129,7 +4484,7 @@
                 </a:solidFill>
                 <a:latin typeface="Calibri"/>
               </a:rPr>
-              <a:t>0</a:t>
+              <a:t>+9,5 p.p.</a:t>
             </a:r>
           </a:p>
         </p:txBody>
@@ -5164,7 +4519,7 @@
                 </a:solidFill>
                 <a:latin typeface="Calibri"/>
               </a:rPr>
-              <a:t>Betweenness negros</a:t>
+              <a:t>Penalidade interseccional</a:t>
             </a:r>
           </a:p>
         </p:txBody>
@@ -5199,7 +4554,7 @@
                 </a:solidFill>
                 <a:latin typeface="Calibri"/>
               </a:rPr>
-              <a:t>em todas as escolaridades (SNA)</a:t>
+              <a:t>Mulher Negra (nao-aditiva)</a:t>
             </a:r>
           </a:p>
         </p:txBody>
@@ -5632,7 +4987,7 @@
                 </a:solidFill>
                 <a:latin typeface="Calibri"/>
               </a:rPr>
-              <a:t>E geograficamente heterogenea</a:t>
+              <a:t>Pesa mais na base da distribuicao</a:t>
             </a:r>
           </a:p>
         </p:txBody>
@@ -5667,7 +5022,7 @@
                 </a:solidFill>
                 <a:latin typeface="Calibri"/>
               </a:rPr>
-              <a:t>O gap varia de -19.7% a -2.1% entre estados (random slope HLM, N=7.689.426). Estados mais ricos (DF, RJ, SP) concentram a MAIOR penalidade.</a:t>
+              <a:t>Sticky floor: a discriminacao de preco (retornos) vai de 35,1% no q10 a 12,9% no q90 (RIF) — quem esta na base sofre proporcionalmente mais.</a:t>
             </a:r>
           </a:p>
         </p:txBody>
@@ -5788,7 +5143,7 @@
                 </a:solidFill>
                 <a:latin typeface="Calibri"/>
               </a:rPr>
-              <a:t>Politicas precisam ser especificas e focalizadas</a:t>
+              <a:t>Politicas precisam priorizar o acesso</a:t>
             </a:r>
           </a:p>
         </p:txBody>
@@ -5823,7 +5178,7 @@
                 </a:solidFill>
                 <a:latin typeface="Calibri"/>
               </a:rPr>
-              <a:t>Cotas ocupacionais (CBO) + mentoria atacam 84% do problema. E focalizar o orcamento nas UFs de maior penalidade rende +68,2% vs. distribuicao uniforme (DF, Norte primeiro).</a:t>
+              <a:t>Cotas ocupacionais (CBO) + mentoria atacam o principal canal: a porta de entrada, onde esta ~84% do gap (composicao/acesso).</a:t>
             </a:r>
           </a:p>
         </p:txBody>
@@ -7183,7 +6538,7 @@
                 <a:latin typeface="Calibri"/>
               </a:rPr>
               <a:t>▸  Causa: segregacao residencial e
-exclusao das redes profissionais</a:t>
+restricao de acesso a ocupacoes qualificadas</a:t>
             </a:r>
           </a:p>
         </p:txBody>
@@ -7446,8 +6801,8 @@
                 </a:solidFill>
                 <a:latin typeface="Calibri"/>
               </a:rPr>
-              <a:t>▸  Gap varia entre estados: SD = 5,0 log-pt
-(random slope HLM — N=7,7M)</a:t>
+              <a:t>▸  Discriminacao de preco maior na base da
+distribuicao (sticky floor, RIF)</a:t>
             </a:r>
           </a:p>
         </p:txBody>
@@ -7603,7 +6958,7 @@
                 </a:solidFill>
                 <a:latin typeface="Calibri"/>
               </a:rPr>
-              <a:t>Isolamento Estrutural</a:t>
+              <a:t>Teto de Vidro</a:t>
             </a:r>
           </a:p>
         </p:txBody>
@@ -7638,8 +6993,8 @@
                 </a:solidFill>
                 <a:latin typeface="Calibri"/>
               </a:rPr>
-              <a:t>▸  Betweenness centrality = 0 para negros
-em TODAS as faixas de escolaridade (SNA)</a:t>
+              <a:t>▸  Gap cresce ao longo da renda: de -8,0%
+no q10 para -12,3% no q95 (quantilica)</a:t>
             </a:r>
           </a:p>
         </p:txBody>
@@ -7674,8 +7029,8 @@
                 </a:solidFill>
                 <a:latin typeface="Calibri"/>
               </a:rPr>
-              <a:t>▸  Diplomas negros valem menos porque
-faltam redes para converte-los em empregos</a:t>
+              <a:t>▸  Negros sao excluidos das posicoes
+mais rentaveis (glass ceiling por dotacao)</a:t>
             </a:r>
           </a:p>
         </p:txBody>
@@ -10892,7 +10247,7 @@
                 </a:solidFill>
                 <a:latin typeface="Calibri"/>
               </a:rPr>
-              <a:t>Genero (GLMM random slope): o teto de vidro feminino e de RENDA, nao de categoria — mulheres acessam ocupacoes qualificadas (OR=1,99) mas nao o topo de renda (OR top10=0,518).</a:t>
+              <a:t>Genero (GLMM): o teto de vidro feminino e de RENDA, nao de categoria — mulheres acessam ocupacoes qualificadas (OR=1,99) mas nao o topo de renda (OR top10=0,518).</a:t>
             </a:r>
           </a:p>
         </p:txBody>
@@ -11097,7 +10452,7 @@
                 </a:solidFill>
                 <a:latin typeface="Calibri"/>
               </a:rPr>
-              <a:t>6. Redes e Heterogeneidade Geografica — A Dimensao Invisivel</a:t>
+              <a:t>7. O Gap e Real — Tres Testes de Robustez</a:t>
             </a:r>
           </a:p>
         </p:txBody>
@@ -11132,7 +10487,7 @@
                 </a:solidFill>
                 <a:latin typeface="Calibri"/>
               </a:rPr>
-              <a:t>SNA: exclusao das redes | HLM Random Slope: discriminacao varia 5x entre estados (N=7,7M)</a:t>
+              <a:t>Nenhuma variavel omitida plausivel consegue anular os resultados</a:t>
             </a:r>
           </a:p>
         </p:txBody>
@@ -11145,8 +10500,8 @@
         </p:nvSpPr>
         <p:spPr>
           <a:xfrm>
-            <a:off x="274320" y="1024128"/>
-            <a:ext cx="5669280" cy="384048"/>
+            <a:off x="365760" y="1024128"/>
+            <a:ext cx="11430000" cy="384048"/>
           </a:xfrm>
           <a:prstGeom prst="rect">
             <a:avLst/>
@@ -11161,61 +10516,37 @@
           <a:p>
             <a:pPr algn="l"/>
             <a:r>
-              <a:rPr sz="1600" b="1" i="0">
+              <a:rPr sz="1800" b="1" i="0">
                 <a:solidFill>
                   <a:srgbClr val="1F3864"/>
                 </a:solidFill>
                 <a:latin typeface="Calibri"/>
               </a:rPr>
-              <a:t>Exclusao das Redes (SNA):</a:t>
-            </a:r>
-          </a:p>
-        </p:txBody>
-      </p:sp>
-      <p:pic>
-        <p:nvPicPr>
-          <p:cNvPr id="6" name="Picture 5" descr="sna_rede_demografica.png"/>
-          <p:cNvPicPr>
-            <a:picLocks noChangeAspect="1"/>
-          </p:cNvPicPr>
-          <p:nvPr/>
-        </p:nvPicPr>
-        <p:blipFill>
-          <a:blip r:embed="rId2"/>
-          <a:stretch>
-            <a:fillRect/>
-          </a:stretch>
-        </p:blipFill>
-        <p:spPr>
-          <a:xfrm>
-            <a:off x="274320" y="1463040"/>
-            <a:ext cx="5669280" cy="3474720"/>
-          </a:xfrm>
-          <a:prstGeom prst="rect">
-            <a:avLst/>
-          </a:prstGeom>
-        </p:spPr>
-      </p:pic>
-      <p:sp>
-        <p:nvSpPr>
-          <p:cNvPr id="7" name="Rectangle 6"/>
+              <a:t>Poderia o gap ser explicado por variaveis nao observadas?</a:t>
+            </a:r>
+          </a:p>
+        </p:txBody>
+      </p:sp>
+      <p:sp>
+        <p:nvSpPr>
+          <p:cNvPr id="6" name="Rectangle 5"/>
           <p:cNvSpPr/>
           <p:nvPr/>
         </p:nvSpPr>
         <p:spPr>
           <a:xfrm>
-            <a:off x="274320" y="5029200"/>
-            <a:ext cx="5669280" cy="1005840"/>
+            <a:off x="274320" y="1508760"/>
+            <a:ext cx="3749039" cy="4434840"/>
           </a:xfrm>
           <a:prstGeom prst="rect">
             <a:avLst/>
           </a:prstGeom>
           <a:solidFill>
-            <a:srgbClr val="FFEBEE"/>
+            <a:srgbClr val="F5F5F5"/>
           </a:solidFill>
-          <a:ln w="12700">
+          <a:ln w="25400">
             <a:solidFill>
-              <a:srgbClr val="B71C1C"/>
+              <a:srgbClr val="1F3864"/>
             </a:solidFill>
           </a:ln>
         </p:spPr>
@@ -11243,123 +10574,22 @@
       </p:sp>
       <p:sp>
         <p:nvSpPr>
-          <p:cNvPr id="8" name="TextBox 7"/>
-          <p:cNvSpPr txBox="1"/>
-          <p:nvPr/>
-        </p:nvSpPr>
-        <p:spPr>
-          <a:xfrm>
-            <a:off x="411480" y="5074920"/>
-            <a:ext cx="5394960" cy="914400"/>
-          </a:xfrm>
-          <a:prstGeom prst="rect">
-            <a:avLst/>
-          </a:prstGeom>
-          <a:noFill/>
-        </p:spPr>
-        <p:txBody>
-          <a:bodyPr wrap="square">
-            <a:spAutoFit/>
-          </a:bodyPr>
-          <a:lstStyle/>
-          <a:p>
-            <a:pPr algn="l"/>
-            <a:r>
-              <a:rPr sz="1300" b="1" i="0">
-                <a:solidFill>
-                  <a:srgbClr val="B71C1C"/>
-                </a:solidFill>
-                <a:latin typeface="Calibri"/>
-              </a:rPr>
-              <a:t>Betweenness centrality = 0 para negros
-em TODOS os niveis de escolaridade.
-Diplomas negros valem menos porque
-faltam redes para converter titulos em empregos.</a:t>
-            </a:r>
-          </a:p>
-        </p:txBody>
-      </p:sp>
-      <p:sp>
-        <p:nvSpPr>
-          <p:cNvPr id="9" name="TextBox 8"/>
-          <p:cNvSpPr txBox="1"/>
-          <p:nvPr/>
-        </p:nvSpPr>
-        <p:spPr>
-          <a:xfrm>
-            <a:off x="6309360" y="1024128"/>
-            <a:ext cx="5577840" cy="384048"/>
-          </a:xfrm>
-          <a:prstGeom prst="rect">
-            <a:avLst/>
-          </a:prstGeom>
-          <a:noFill/>
-        </p:spPr>
-        <p:txBody>
-          <a:bodyPr wrap="square">
-            <a:spAutoFit/>
-          </a:bodyPr>
-          <a:lstStyle/>
-          <a:p>
-            <a:pPr algn="l"/>
-            <a:r>
-              <a:rPr sz="1600" b="1" i="0">
-                <a:solidFill>
-                  <a:srgbClr val="1F3864"/>
-                </a:solidFill>
-                <a:latin typeface="Calibri"/>
-              </a:rPr>
-              <a:t>Discriminacao varia entre estados (HLM):</a:t>
-            </a:r>
-          </a:p>
-        </p:txBody>
-      </p:sp>
-      <p:pic>
-        <p:nvPicPr>
-          <p:cNvPr id="10" name="Picture 9" descr="mapa_po_regional.png"/>
-          <p:cNvPicPr>
-            <a:picLocks noChangeAspect="1"/>
-          </p:cNvPicPr>
-          <p:nvPr/>
-        </p:nvPicPr>
-        <p:blipFill>
-          <a:blip r:embed="rId3"/>
-          <a:stretch>
-            <a:fillRect/>
-          </a:stretch>
-        </p:blipFill>
-        <p:spPr>
-          <a:xfrm>
-            <a:off x="6903720" y="1371600"/>
-            <a:ext cx="3931920" cy="3809481"/>
-          </a:xfrm>
-          <a:prstGeom prst="rect">
-            <a:avLst/>
-          </a:prstGeom>
-        </p:spPr>
-      </p:pic>
-      <p:sp>
-        <p:nvSpPr>
-          <p:cNvPr id="11" name="Rectangle 10"/>
+          <p:cNvPr id="7" name="Rectangle 6"/>
           <p:cNvSpPr/>
           <p:nvPr/>
         </p:nvSpPr>
         <p:spPr>
           <a:xfrm>
-            <a:off x="6309360" y="5870448"/>
-            <a:ext cx="5577840" cy="603504"/>
+            <a:off x="274320" y="1508760"/>
+            <a:ext cx="3749039" cy="457200"/>
           </a:xfrm>
           <a:prstGeom prst="rect">
             <a:avLst/>
           </a:prstGeom>
           <a:solidFill>
-            <a:srgbClr val="E3F2FD"/>
+            <a:srgbClr val="1F3864"/>
           </a:solidFill>
-          <a:ln w="12700">
-            <a:solidFill>
-              <a:srgbClr val="1F3864"/>
-            </a:solidFill>
-          </a:ln>
+          <a:ln/>
         </p:spPr>
         <p:style>
           <a:lnRef idx="1">
@@ -11385,14 +10615,14 @@
       </p:sp>
       <p:sp>
         <p:nvSpPr>
-          <p:cNvPr id="12" name="TextBox 11"/>
-          <p:cNvSpPr txBox="1"/>
-          <p:nvPr/>
-        </p:nvSpPr>
-        <p:spPr>
-          <a:xfrm>
-            <a:off x="6400800" y="5907024"/>
-            <a:ext cx="5394960" cy="530352"/>
+          <p:cNvPr id="8" name="TextBox 7"/>
+          <p:cNvSpPr txBox="1"/>
+          <p:nvPr/>
+        </p:nvSpPr>
+        <p:spPr>
+          <a:xfrm>
+            <a:off x="411480" y="1545336"/>
+            <a:ext cx="3474720" cy="411480"/>
           </a:xfrm>
           <a:prstGeom prst="rect">
             <a:avLst/>
@@ -11407,33 +10637,103 @@
           <a:p>
             <a:pPr algn="l"/>
             <a:r>
-              <a:rPr sz="1050" b="1" i="0">
+              <a:rPr sz="1300" b="1" i="0">
+                <a:solidFill>
+                  <a:srgbClr val="FFFFFF"/>
+                </a:solidFill>
+                <a:latin typeface="Calibri"/>
+              </a:rPr>
+              <a:t>Konfound (Frank, 2013)</a:t>
+            </a:r>
+          </a:p>
+        </p:txBody>
+      </p:sp>
+      <p:sp>
+        <p:nvSpPr>
+          <p:cNvPr id="9" name="TextBox 8"/>
+          <p:cNvSpPr txBox="1"/>
+          <p:nvPr/>
+        </p:nvSpPr>
+        <p:spPr>
+          <a:xfrm>
+            <a:off x="411480" y="2084831"/>
+            <a:ext cx="3474720" cy="594360"/>
+          </a:xfrm>
+          <a:prstGeom prst="rect">
+            <a:avLst/>
+          </a:prstGeom>
+          <a:noFill/>
+        </p:spPr>
+        <p:txBody>
+          <a:bodyPr wrap="square">
+            <a:spAutoFit/>
+          </a:bodyPr>
+          <a:lstStyle/>
+          <a:p>
+            <a:pPr algn="ctr"/>
+            <a:r>
+              <a:rPr sz="2600" b="1" i="0">
                 <a:solidFill>
                   <a:srgbClr val="1F3864"/>
                 </a:solidFill>
                 <a:latin typeface="Calibri"/>
               </a:rPr>
-              <a:t>Amplitude -20% a -2% entre UFs | LRT LR=7548, p&lt;0,001*** — maior penalidade nos estados mais ricos (DF, RJ, SP), nao nos mais pobres.</a:t>
-            </a:r>
-          </a:p>
-        </p:txBody>
-      </p:sp>
-      <p:sp>
-        <p:nvSpPr>
-          <p:cNvPr id="13" name="Rectangle 12"/>
+              <a:t>99,5% dos casos</a:t>
+            </a:r>
+          </a:p>
+        </p:txBody>
+      </p:sp>
+      <p:sp>
+        <p:nvSpPr>
+          <p:cNvPr id="10" name="TextBox 9"/>
+          <p:cNvSpPr txBox="1"/>
+          <p:nvPr/>
+        </p:nvSpPr>
+        <p:spPr>
+          <a:xfrm>
+            <a:off x="411480" y="2743200"/>
+            <a:ext cx="3474720" cy="1005840"/>
+          </a:xfrm>
+          <a:prstGeom prst="rect">
+            <a:avLst/>
+          </a:prstGeom>
+          <a:noFill/>
+        </p:spPr>
+        <p:txBody>
+          <a:bodyPr wrap="square">
+            <a:spAutoFit/>
+          </a:bodyPr>
+          <a:lstStyle/>
+          <a:p>
+            <a:pPr algn="l"/>
+            <a:r>
+              <a:rPr sz="1300" b="0" i="0">
+                <a:solidFill>
+                  <a:srgbClr val="212121"/>
+                </a:solidFill>
+                <a:latin typeface="Calibri"/>
+              </a:rPr>
+              <a:t>precisariam ser removidos ou alterados para anular o resultado</a:t>
+            </a:r>
+          </a:p>
+        </p:txBody>
+      </p:sp>
+      <p:sp>
+        <p:nvSpPr>
+          <p:cNvPr id="11" name="Rectangle 10"/>
           <p:cNvSpPr/>
           <p:nvPr/>
         </p:nvSpPr>
         <p:spPr>
           <a:xfrm>
-            <a:off x="0" y="6601968"/>
-            <a:ext cx="12188952" cy="256032"/>
+            <a:off x="320040" y="3822191"/>
+            <a:ext cx="3657600" cy="27432"/>
           </a:xfrm>
           <a:prstGeom prst="rect">
             <a:avLst/>
           </a:prstGeom>
           <a:solidFill>
-            <a:srgbClr val="1F3864"/>
+            <a:srgbClr val="616161"/>
           </a:solidFill>
           <a:ln/>
         </p:spPr>
@@ -11461,7 +10761,694 @@
       </p:sp>
       <p:sp>
         <p:nvSpPr>
-          <p:cNvPr id="14" name="TextBox 13"/>
+          <p:cNvPr id="12" name="TextBox 11"/>
+          <p:cNvSpPr txBox="1"/>
+          <p:nvPr/>
+        </p:nvSpPr>
+        <p:spPr>
+          <a:xfrm>
+            <a:off x="411480" y="3886200"/>
+            <a:ext cx="3474720" cy="1005840"/>
+          </a:xfrm>
+          <a:prstGeom prst="rect">
+            <a:avLst/>
+          </a:prstGeom>
+          <a:noFill/>
+        </p:spPr>
+        <p:txBody>
+          <a:bodyPr wrap="square">
+            <a:spAutoFit/>
+          </a:bodyPr>
+          <a:lstStyle/>
+          <a:p>
+            <a:pPr algn="l"/>
+            <a:r>
+              <a:rPr sz="1150" b="0" i="1">
+                <a:solidFill>
+                  <a:srgbClr val="616161"/>
+                </a:solidFill>
+                <a:latin typeface="Calibri"/>
+              </a:rPr>
+              <a:t>Como referencia: um confundidor assim nunca existiu em Ciencias Sociais</a:t>
+            </a:r>
+          </a:p>
+        </p:txBody>
+      </p:sp>
+      <p:sp>
+        <p:nvSpPr>
+          <p:cNvPr id="13" name="Rectangle 12"/>
+          <p:cNvSpPr/>
+          <p:nvPr/>
+        </p:nvSpPr>
+        <p:spPr>
+          <a:xfrm>
+            <a:off x="4251959" y="1508760"/>
+            <a:ext cx="3749039" cy="4434840"/>
+          </a:xfrm>
+          <a:prstGeom prst="rect">
+            <a:avLst/>
+          </a:prstGeom>
+          <a:solidFill>
+            <a:srgbClr val="F5F5F5"/>
+          </a:solidFill>
+          <a:ln w="25400">
+            <a:solidFill>
+              <a:srgbClr val="B71C1C"/>
+            </a:solidFill>
+          </a:ln>
+        </p:spPr>
+        <p:style>
+          <a:lnRef idx="1">
+            <a:schemeClr val="accent1"/>
+          </a:lnRef>
+          <a:fillRef idx="3">
+            <a:schemeClr val="accent1"/>
+          </a:fillRef>
+          <a:effectRef idx="2">
+            <a:schemeClr val="accent1"/>
+          </a:effectRef>
+          <a:fontRef idx="minor">
+            <a:schemeClr val="lt1"/>
+          </a:fontRef>
+        </p:style>
+        <p:txBody>
+          <a:bodyPr rtlCol="0" anchor="ctr"/>
+          <a:lstStyle/>
+          <a:p>
+            <a:pPr algn="ctr"/>
+          </a:p>
+        </p:txBody>
+      </p:sp>
+      <p:sp>
+        <p:nvSpPr>
+          <p:cNvPr id="14" name="Rectangle 13"/>
+          <p:cNvSpPr/>
+          <p:nvPr/>
+        </p:nvSpPr>
+        <p:spPr>
+          <a:xfrm>
+            <a:off x="4251959" y="1508760"/>
+            <a:ext cx="3749039" cy="457200"/>
+          </a:xfrm>
+          <a:prstGeom prst="rect">
+            <a:avLst/>
+          </a:prstGeom>
+          <a:solidFill>
+            <a:srgbClr val="B71C1C"/>
+          </a:solidFill>
+          <a:ln/>
+        </p:spPr>
+        <p:style>
+          <a:lnRef idx="1">
+            <a:schemeClr val="accent1"/>
+          </a:lnRef>
+          <a:fillRef idx="3">
+            <a:schemeClr val="accent1"/>
+          </a:fillRef>
+          <a:effectRef idx="2">
+            <a:schemeClr val="accent1"/>
+          </a:effectRef>
+          <a:fontRef idx="minor">
+            <a:schemeClr val="lt1"/>
+          </a:fontRef>
+        </p:style>
+        <p:txBody>
+          <a:bodyPr rtlCol="0" anchor="ctr"/>
+          <a:lstStyle/>
+          <a:p>
+            <a:pPr algn="ctr"/>
+          </a:p>
+        </p:txBody>
+      </p:sp>
+      <p:sp>
+        <p:nvSpPr>
+          <p:cNvPr id="15" name="TextBox 14"/>
+          <p:cNvSpPr txBox="1"/>
+          <p:nvPr/>
+        </p:nvSpPr>
+        <p:spPr>
+          <a:xfrm>
+            <a:off x="4389119" y="1545336"/>
+            <a:ext cx="3474720" cy="411480"/>
+          </a:xfrm>
+          <a:prstGeom prst="rect">
+            <a:avLst/>
+          </a:prstGeom>
+          <a:noFill/>
+        </p:spPr>
+        <p:txBody>
+          <a:bodyPr wrap="square">
+            <a:spAutoFit/>
+          </a:bodyPr>
+          <a:lstStyle/>
+          <a:p>
+            <a:pPr algn="l"/>
+            <a:r>
+              <a:rPr sz="1300" b="1" i="0">
+                <a:solidFill>
+                  <a:srgbClr val="FFFFFF"/>
+                </a:solidFill>
+                <a:latin typeface="Calibri"/>
+              </a:rPr>
+              <a:t>E-values (VanderWeele, 2017)</a:t>
+            </a:r>
+          </a:p>
+        </p:txBody>
+      </p:sp>
+      <p:sp>
+        <p:nvSpPr>
+          <p:cNvPr id="16" name="TextBox 15"/>
+          <p:cNvSpPr txBox="1"/>
+          <p:nvPr/>
+        </p:nvSpPr>
+        <p:spPr>
+          <a:xfrm>
+            <a:off x="4389119" y="2084831"/>
+            <a:ext cx="3474720" cy="594360"/>
+          </a:xfrm>
+          <a:prstGeom prst="rect">
+            <a:avLst/>
+          </a:prstGeom>
+          <a:noFill/>
+        </p:spPr>
+        <p:txBody>
+          <a:bodyPr wrap="square">
+            <a:spAutoFit/>
+          </a:bodyPr>
+          <a:lstStyle/>
+          <a:p>
+            <a:pPr algn="ctr"/>
+            <a:r>
+              <a:rPr sz="2600" b="1" i="0">
+                <a:solidFill>
+                  <a:srgbClr val="B71C1C"/>
+                </a:solidFill>
+                <a:latin typeface="Calibri"/>
+              </a:rPr>
+              <a:t>E &gt;= 2,24x</a:t>
+            </a:r>
+          </a:p>
+        </p:txBody>
+      </p:sp>
+      <p:sp>
+        <p:nvSpPr>
+          <p:cNvPr id="17" name="TextBox 16"/>
+          <p:cNvSpPr txBox="1"/>
+          <p:nvPr/>
+        </p:nvSpPr>
+        <p:spPr>
+          <a:xfrm>
+            <a:off x="4389119" y="2743200"/>
+            <a:ext cx="3474720" cy="1005840"/>
+          </a:xfrm>
+          <a:prstGeom prst="rect">
+            <a:avLst/>
+          </a:prstGeom>
+          <a:noFill/>
+        </p:spPr>
+        <p:txBody>
+          <a:bodyPr wrap="square">
+            <a:spAutoFit/>
+          </a:bodyPr>
+          <a:lstStyle/>
+          <a:p>
+            <a:pPr algn="l"/>
+            <a:r>
+              <a:rPr sz="1300" b="0" i="0">
+                <a:solidFill>
+                  <a:srgbClr val="212121"/>
+                </a:solidFill>
+                <a:latin typeface="Calibri"/>
+              </a:rPr>
+              <a:t>de associacao com raca E com ocupacao simultaneamente</a:t>
+            </a:r>
+          </a:p>
+        </p:txBody>
+      </p:sp>
+      <p:sp>
+        <p:nvSpPr>
+          <p:cNvPr id="18" name="Rectangle 17"/>
+          <p:cNvSpPr/>
+          <p:nvPr/>
+        </p:nvSpPr>
+        <p:spPr>
+          <a:xfrm>
+            <a:off x="4297679" y="3822191"/>
+            <a:ext cx="3657600" cy="27432"/>
+          </a:xfrm>
+          <a:prstGeom prst="rect">
+            <a:avLst/>
+          </a:prstGeom>
+          <a:solidFill>
+            <a:srgbClr val="616161"/>
+          </a:solidFill>
+          <a:ln/>
+        </p:spPr>
+        <p:style>
+          <a:lnRef idx="1">
+            <a:schemeClr val="accent1"/>
+          </a:lnRef>
+          <a:fillRef idx="3">
+            <a:schemeClr val="accent1"/>
+          </a:fillRef>
+          <a:effectRef idx="2">
+            <a:schemeClr val="accent1"/>
+          </a:effectRef>
+          <a:fontRef idx="minor">
+            <a:schemeClr val="lt1"/>
+          </a:fontRef>
+        </p:style>
+        <p:txBody>
+          <a:bodyPr rtlCol="0" anchor="ctr"/>
+          <a:lstStyle/>
+          <a:p>
+            <a:pPr algn="ctr"/>
+          </a:p>
+        </p:txBody>
+      </p:sp>
+      <p:sp>
+        <p:nvSpPr>
+          <p:cNvPr id="19" name="TextBox 18"/>
+          <p:cNvSpPr txBox="1"/>
+          <p:nvPr/>
+        </p:nvSpPr>
+        <p:spPr>
+          <a:xfrm>
+            <a:off x="4389119" y="3886200"/>
+            <a:ext cx="3474720" cy="1005840"/>
+          </a:xfrm>
+          <a:prstGeom prst="rect">
+            <a:avLst/>
+          </a:prstGeom>
+          <a:noFill/>
+        </p:spPr>
+        <p:txBody>
+          <a:bodyPr wrap="square">
+            <a:spAutoFit/>
+          </a:bodyPr>
+          <a:lstStyle/>
+          <a:p>
+            <a:pPr algn="l"/>
+            <a:r>
+              <a:rPr sz="1150" b="0" i="1">
+                <a:solidFill>
+                  <a:srgbClr val="616161"/>
+                </a:solidFill>
+                <a:latin typeface="Calibri"/>
+              </a:rPr>
+              <a:t>Uma variavel oculta teria que ser 2,3x mais preditiva que TODAS as observadas juntas</a:t>
+            </a:r>
+          </a:p>
+        </p:txBody>
+      </p:sp>
+      <p:sp>
+        <p:nvSpPr>
+          <p:cNvPr id="20" name="Rectangle 19"/>
+          <p:cNvSpPr/>
+          <p:nvPr/>
+        </p:nvSpPr>
+        <p:spPr>
+          <a:xfrm>
+            <a:off x="8229598" y="1508760"/>
+            <a:ext cx="3749039" cy="4434840"/>
+          </a:xfrm>
+          <a:prstGeom prst="rect">
+            <a:avLst/>
+          </a:prstGeom>
+          <a:solidFill>
+            <a:srgbClr val="F5F5F5"/>
+          </a:solidFill>
+          <a:ln w="25400">
+            <a:solidFill>
+              <a:srgbClr val="1565C0"/>
+            </a:solidFill>
+          </a:ln>
+        </p:spPr>
+        <p:style>
+          <a:lnRef idx="1">
+            <a:schemeClr val="accent1"/>
+          </a:lnRef>
+          <a:fillRef idx="3">
+            <a:schemeClr val="accent1"/>
+          </a:fillRef>
+          <a:effectRef idx="2">
+            <a:schemeClr val="accent1"/>
+          </a:effectRef>
+          <a:fontRef idx="minor">
+            <a:schemeClr val="lt1"/>
+          </a:fontRef>
+        </p:style>
+        <p:txBody>
+          <a:bodyPr rtlCol="0" anchor="ctr"/>
+          <a:lstStyle/>
+          <a:p>
+            <a:pPr algn="ctr"/>
+          </a:p>
+        </p:txBody>
+      </p:sp>
+      <p:sp>
+        <p:nvSpPr>
+          <p:cNvPr id="21" name="Rectangle 20"/>
+          <p:cNvSpPr/>
+          <p:nvPr/>
+        </p:nvSpPr>
+        <p:spPr>
+          <a:xfrm>
+            <a:off x="8229598" y="1508760"/>
+            <a:ext cx="3749039" cy="457200"/>
+          </a:xfrm>
+          <a:prstGeom prst="rect">
+            <a:avLst/>
+          </a:prstGeom>
+          <a:solidFill>
+            <a:srgbClr val="1565C0"/>
+          </a:solidFill>
+          <a:ln/>
+        </p:spPr>
+        <p:style>
+          <a:lnRef idx="1">
+            <a:schemeClr val="accent1"/>
+          </a:lnRef>
+          <a:fillRef idx="3">
+            <a:schemeClr val="accent1"/>
+          </a:fillRef>
+          <a:effectRef idx="2">
+            <a:schemeClr val="accent1"/>
+          </a:effectRef>
+          <a:fontRef idx="minor">
+            <a:schemeClr val="lt1"/>
+          </a:fontRef>
+        </p:style>
+        <p:txBody>
+          <a:bodyPr rtlCol="0" anchor="ctr"/>
+          <a:lstStyle/>
+          <a:p>
+            <a:pPr algn="ctr"/>
+          </a:p>
+        </p:txBody>
+      </p:sp>
+      <p:sp>
+        <p:nvSpPr>
+          <p:cNvPr id="22" name="TextBox 21"/>
+          <p:cNvSpPr txBox="1"/>
+          <p:nvPr/>
+        </p:nvSpPr>
+        <p:spPr>
+          <a:xfrm>
+            <a:off x="8366758" y="1545336"/>
+            <a:ext cx="3474720" cy="411480"/>
+          </a:xfrm>
+          <a:prstGeom prst="rect">
+            <a:avLst/>
+          </a:prstGeom>
+          <a:noFill/>
+        </p:spPr>
+        <p:txBody>
+          <a:bodyPr wrap="square">
+            <a:spAutoFit/>
+          </a:bodyPr>
+          <a:lstStyle/>
+          <a:p>
+            <a:pPr algn="l"/>
+            <a:r>
+              <a:rPr sz="1300" b="1" i="0">
+                <a:solidFill>
+                  <a:srgbClr val="FFFFFF"/>
+                </a:solidFill>
+                <a:latin typeface="Calibri"/>
+              </a:rPr>
+              <a:t>Oster Bounds (Oster, 2019)</a:t>
+            </a:r>
+          </a:p>
+        </p:txBody>
+      </p:sp>
+      <p:sp>
+        <p:nvSpPr>
+          <p:cNvPr id="23" name="TextBox 22"/>
+          <p:cNvSpPr txBox="1"/>
+          <p:nvPr/>
+        </p:nvSpPr>
+        <p:spPr>
+          <a:xfrm>
+            <a:off x="8366758" y="2084831"/>
+            <a:ext cx="3474720" cy="594360"/>
+          </a:xfrm>
+          <a:prstGeom prst="rect">
+            <a:avLst/>
+          </a:prstGeom>
+          <a:noFill/>
+        </p:spPr>
+        <p:txBody>
+          <a:bodyPr wrap="square">
+            <a:spAutoFit/>
+          </a:bodyPr>
+          <a:lstStyle/>
+          <a:p>
+            <a:pPr algn="ctr"/>
+            <a:r>
+              <a:rPr sz="2600" b="1" i="0">
+                <a:solidFill>
+                  <a:srgbClr val="1565C0"/>
+                </a:solidFill>
+                <a:latin typeface="Calibri"/>
+              </a:rPr>
+              <a:t>delta* negativo</a:t>
+            </a:r>
+          </a:p>
+        </p:txBody>
+      </p:sp>
+      <p:sp>
+        <p:nvSpPr>
+          <p:cNvPr id="24" name="TextBox 23"/>
+          <p:cNvSpPr txBox="1"/>
+          <p:nvPr/>
+        </p:nvSpPr>
+        <p:spPr>
+          <a:xfrm>
+            <a:off x="8366758" y="2743200"/>
+            <a:ext cx="3474720" cy="1005840"/>
+          </a:xfrm>
+          <a:prstGeom prst="rect">
+            <a:avLst/>
+          </a:prstGeom>
+          <a:noFill/>
+        </p:spPr>
+        <p:txBody>
+          <a:bodyPr wrap="square">
+            <a:spAutoFit/>
+          </a:bodyPr>
+          <a:lstStyle/>
+          <a:p>
+            <a:pPr algn="l"/>
+            <a:r>
+              <a:rPr sz="1300" b="0" i="0">
+                <a:solidFill>
+                  <a:srgbClr val="212121"/>
+                </a:solidFill>
+                <a:latin typeface="Calibri"/>
+              </a:rPr>
+              <a:t>variaveis omitidas teriam que agir na direcao OPOSTA as observadas</a:t>
+            </a:r>
+          </a:p>
+        </p:txBody>
+      </p:sp>
+      <p:sp>
+        <p:nvSpPr>
+          <p:cNvPr id="25" name="Rectangle 24"/>
+          <p:cNvSpPr/>
+          <p:nvPr/>
+        </p:nvSpPr>
+        <p:spPr>
+          <a:xfrm>
+            <a:off x="8275318" y="3822191"/>
+            <a:ext cx="3657600" cy="27432"/>
+          </a:xfrm>
+          <a:prstGeom prst="rect">
+            <a:avLst/>
+          </a:prstGeom>
+          <a:solidFill>
+            <a:srgbClr val="616161"/>
+          </a:solidFill>
+          <a:ln/>
+        </p:spPr>
+        <p:style>
+          <a:lnRef idx="1">
+            <a:schemeClr val="accent1"/>
+          </a:lnRef>
+          <a:fillRef idx="3">
+            <a:schemeClr val="accent1"/>
+          </a:fillRef>
+          <a:effectRef idx="2">
+            <a:schemeClr val="accent1"/>
+          </a:effectRef>
+          <a:fontRef idx="minor">
+            <a:schemeClr val="lt1"/>
+          </a:fontRef>
+        </p:style>
+        <p:txBody>
+          <a:bodyPr rtlCol="0" anchor="ctr"/>
+          <a:lstStyle/>
+          <a:p>
+            <a:pPr algn="ctr"/>
+          </a:p>
+        </p:txBody>
+      </p:sp>
+      <p:sp>
+        <p:nvSpPr>
+          <p:cNvPr id="26" name="TextBox 25"/>
+          <p:cNvSpPr txBox="1"/>
+          <p:nvPr/>
+        </p:nvSpPr>
+        <p:spPr>
+          <a:xfrm>
+            <a:off x="8366758" y="3886200"/>
+            <a:ext cx="3474720" cy="1005840"/>
+          </a:xfrm>
+          <a:prstGeom prst="rect">
+            <a:avLst/>
+          </a:prstGeom>
+          <a:noFill/>
+        </p:spPr>
+        <p:txBody>
+          <a:bodyPr wrap="square">
+            <a:spAutoFit/>
+          </a:bodyPr>
+          <a:lstStyle/>
+          <a:p>
+            <a:pPr algn="l"/>
+            <a:r>
+              <a:rPr sz="1150" b="0" i="1">
+                <a:solidFill>
+                  <a:srgbClr val="616161"/>
+                </a:solidFill>
+                <a:latin typeface="Calibri"/>
+              </a:rPr>
+              <a:t>Impossivel: estudos mostram que omitidas e observadas agem na mesma direcao</a:t>
+            </a:r>
+          </a:p>
+        </p:txBody>
+      </p:sp>
+      <p:sp>
+        <p:nvSpPr>
+          <p:cNvPr id="27" name="Rectangle 26"/>
+          <p:cNvSpPr/>
+          <p:nvPr/>
+        </p:nvSpPr>
+        <p:spPr>
+          <a:xfrm>
+            <a:off x="274320" y="6053328"/>
+            <a:ext cx="11612880" cy="530352"/>
+          </a:xfrm>
+          <a:prstGeom prst="rect">
+            <a:avLst/>
+          </a:prstGeom>
+          <a:solidFill>
+            <a:srgbClr val="1F3864"/>
+          </a:solidFill>
+          <a:ln/>
+        </p:spPr>
+        <p:style>
+          <a:lnRef idx="1">
+            <a:schemeClr val="accent1"/>
+          </a:lnRef>
+          <a:fillRef idx="3">
+            <a:schemeClr val="accent1"/>
+          </a:fillRef>
+          <a:effectRef idx="2">
+            <a:schemeClr val="accent1"/>
+          </a:effectRef>
+          <a:fontRef idx="minor">
+            <a:schemeClr val="lt1"/>
+          </a:fontRef>
+        </p:style>
+        <p:txBody>
+          <a:bodyPr rtlCol="0" anchor="ctr"/>
+          <a:lstStyle/>
+          <a:p>
+            <a:pPr algn="ctr"/>
+          </a:p>
+        </p:txBody>
+      </p:sp>
+      <p:sp>
+        <p:nvSpPr>
+          <p:cNvPr id="28" name="TextBox 27"/>
+          <p:cNvSpPr txBox="1"/>
+          <p:nvPr/>
+        </p:nvSpPr>
+        <p:spPr>
+          <a:xfrm>
+            <a:off x="457200" y="6099048"/>
+            <a:ext cx="11247120" cy="438912"/>
+          </a:xfrm>
+          <a:prstGeom prst="rect">
+            <a:avLst/>
+          </a:prstGeom>
+          <a:noFill/>
+        </p:spPr>
+        <p:txBody>
+          <a:bodyPr wrap="square">
+            <a:spAutoFit/>
+          </a:bodyPr>
+          <a:lstStyle/>
+          <a:p>
+            <a:pPr algn="ctr"/>
+            <a:r>
+              <a:rPr sz="1350" b="1" i="0">
+                <a:solidFill>
+                  <a:srgbClr val="FFFFFF"/>
+                </a:solidFill>
+                <a:latin typeface="Calibri"/>
+              </a:rPr>
+              <a:t>Veredicto: os tres metodos independentes concordam. O gap racial no mercado de trabalho brasileiro e real,
+robusto e nao pode ser explicado por variaveis ocultas plausíveis.</a:t>
+            </a:r>
+          </a:p>
+        </p:txBody>
+      </p:sp>
+      <p:sp>
+        <p:nvSpPr>
+          <p:cNvPr id="29" name="Rectangle 28"/>
+          <p:cNvSpPr/>
+          <p:nvPr/>
+        </p:nvSpPr>
+        <p:spPr>
+          <a:xfrm>
+            <a:off x="0" y="6601968"/>
+            <a:ext cx="12188952" cy="256032"/>
+          </a:xfrm>
+          <a:prstGeom prst="rect">
+            <a:avLst/>
+          </a:prstGeom>
+          <a:solidFill>
+            <a:srgbClr val="1F3864"/>
+          </a:solidFill>
+          <a:ln/>
+        </p:spPr>
+        <p:style>
+          <a:lnRef idx="1">
+            <a:schemeClr val="accent1"/>
+          </a:lnRef>
+          <a:fillRef idx="3">
+            <a:schemeClr val="accent1"/>
+          </a:fillRef>
+          <a:effectRef idx="2">
+            <a:schemeClr val="accent1"/>
+          </a:effectRef>
+          <a:fontRef idx="minor">
+            <a:schemeClr val="lt1"/>
+          </a:fontRef>
+        </p:style>
+        <p:txBody>
+          <a:bodyPr rtlCol="0" anchor="ctr"/>
+          <a:lstStyle/>
+          <a:p>
+            <a:pPr algn="ctr"/>
+          </a:p>
+        </p:txBody>
+      </p:sp>
+      <p:sp>
+        <p:nvSpPr>
+          <p:cNvPr id="30" name="TextBox 29"/>
           <p:cNvSpPr txBox="1"/>
           <p:nvPr/>
         </p:nvSpPr>
@@ -11496,7 +11483,7 @@
       </p:sp>
       <p:sp>
         <p:nvSpPr>
-          <p:cNvPr id="15" name="TextBox 14"/>
+          <p:cNvPr id="31" name="TextBox 30"/>
           <p:cNvSpPr txBox="1"/>
           <p:nvPr/>
         </p:nvSpPr>
@@ -11524,7 +11511,7 @@
                 </a:solidFill>
                 <a:latin typeface="Calibri"/>
               </a:rPr>
-              <a:t>7/11</a:t>
+              <a:t>8/11</a:t>
             </a:r>
           </a:p>
         </p:txBody>
@@ -11618,7 +11605,7 @@
                 </a:solidFill>
                 <a:latin typeface="Calibri"/>
               </a:rPr>
-              <a:t>7. O Gap e Real — Tres Testes de Robustez</a:t>
+              <a:t>8. O Que Fazer — Tres Eixos de Politica Publica</a:t>
             </a:r>
           </a:p>
         </p:txBody>
@@ -11653,7 +11640,7 @@
                 </a:solidFill>
                 <a:latin typeface="Calibri"/>
               </a:rPr>
-              <a:t>Nenhuma variavel omitida plausivel consegue anular os resultados</a:t>
+              <a:t>Prioridade: atacar a porta de entrada (acesso), nao apenas o salario</a:t>
             </a:r>
           </a:p>
         </p:txBody>
@@ -11666,7 +11653,7 @@
         </p:nvSpPr>
         <p:spPr>
           <a:xfrm>
-            <a:off x="365760" y="1024128"/>
+            <a:off x="365760" y="1005840"/>
             <a:ext cx="11430000" cy="384048"/>
           </a:xfrm>
           <a:prstGeom prst="rect">
@@ -11682,13 +11669,13 @@
           <a:p>
             <a:pPr algn="l"/>
             <a:r>
-              <a:rPr sz="1800" b="1" i="0">
+              <a:rPr sz="1700" b="1" i="0">
                 <a:solidFill>
                   <a:srgbClr val="1F3864"/>
                 </a:solidFill>
                 <a:latin typeface="Calibri"/>
               </a:rPr>
-              <a:t>Poderia o gap ser explicado por variaveis nao observadas?</a:t>
+              <a:t>84% do gap e de ACESSO. As politicas precisam refletir isso.</a:t>
             </a:r>
           </a:p>
         </p:txBody>
@@ -11701,8 +11688,1150 @@
         </p:nvSpPr>
         <p:spPr>
           <a:xfrm>
-            <a:off x="274320" y="1508760"/>
-            <a:ext cx="3749039" cy="4434840"/>
+            <a:off x="274320" y="1481328"/>
+            <a:ext cx="3749039" cy="5074920"/>
+          </a:xfrm>
+          <a:prstGeom prst="rect">
+            <a:avLst/>
+          </a:prstGeom>
+          <a:solidFill>
+            <a:srgbClr val="F5F5F5"/>
+          </a:solidFill>
+          <a:ln w="25400">
+            <a:solidFill>
+              <a:srgbClr val="B71C1C"/>
+            </a:solidFill>
+          </a:ln>
+        </p:spPr>
+        <p:style>
+          <a:lnRef idx="1">
+            <a:schemeClr val="accent1"/>
+          </a:lnRef>
+          <a:fillRef idx="3">
+            <a:schemeClr val="accent1"/>
+          </a:fillRef>
+          <a:effectRef idx="2">
+            <a:schemeClr val="accent1"/>
+          </a:effectRef>
+          <a:fontRef idx="minor">
+            <a:schemeClr val="lt1"/>
+          </a:fontRef>
+        </p:style>
+        <p:txBody>
+          <a:bodyPr rtlCol="0" anchor="ctr"/>
+          <a:lstStyle/>
+          <a:p>
+            <a:pPr algn="ctr"/>
+          </a:p>
+        </p:txBody>
+      </p:sp>
+      <p:sp>
+        <p:nvSpPr>
+          <p:cNvPr id="7" name="Rectangle 6"/>
+          <p:cNvSpPr/>
+          <p:nvPr/>
+        </p:nvSpPr>
+        <p:spPr>
+          <a:xfrm>
+            <a:off x="274320" y="1481328"/>
+            <a:ext cx="3749039" cy="457200"/>
+          </a:xfrm>
+          <a:prstGeom prst="rect">
+            <a:avLst/>
+          </a:prstGeom>
+          <a:solidFill>
+            <a:srgbClr val="B71C1C"/>
+          </a:solidFill>
+          <a:ln/>
+        </p:spPr>
+        <p:style>
+          <a:lnRef idx="1">
+            <a:schemeClr val="accent1"/>
+          </a:lnRef>
+          <a:fillRef idx="3">
+            <a:schemeClr val="accent1"/>
+          </a:fillRef>
+          <a:effectRef idx="2">
+            <a:schemeClr val="accent1"/>
+          </a:effectRef>
+          <a:fontRef idx="minor">
+            <a:schemeClr val="lt1"/>
+          </a:fontRef>
+        </p:style>
+        <p:txBody>
+          <a:bodyPr rtlCol="0" anchor="ctr"/>
+          <a:lstStyle/>
+          <a:p>
+            <a:pPr algn="ctr"/>
+          </a:p>
+        </p:txBody>
+      </p:sp>
+      <p:sp>
+        <p:nvSpPr>
+          <p:cNvPr id="8" name="TextBox 7"/>
+          <p:cNvSpPr txBox="1"/>
+          <p:nvPr/>
+        </p:nvSpPr>
+        <p:spPr>
+          <a:xfrm>
+            <a:off x="411480" y="1517904"/>
+            <a:ext cx="3474720" cy="411480"/>
+          </a:xfrm>
+          <a:prstGeom prst="rect">
+            <a:avLst/>
+          </a:prstGeom>
+          <a:noFill/>
+        </p:spPr>
+        <p:txBody>
+          <a:bodyPr wrap="square">
+            <a:spAutoFit/>
+          </a:bodyPr>
+          <a:lstStyle/>
+          <a:p>
+            <a:pPr algn="l"/>
+            <a:r>
+              <a:rPr sz="1400" b="1" i="0">
+                <a:solidFill>
+                  <a:srgbClr val="FFFFFF"/>
+                </a:solidFill>
+                <a:latin typeface="Calibri"/>
+              </a:rPr>
+              <a:t>#1 — Acesso</a:t>
+            </a:r>
+          </a:p>
+        </p:txBody>
+      </p:sp>
+      <p:sp>
+        <p:nvSpPr>
+          <p:cNvPr id="9" name="Rectangle 8"/>
+          <p:cNvSpPr/>
+          <p:nvPr/>
+        </p:nvSpPr>
+        <p:spPr>
+          <a:xfrm>
+            <a:off x="411480" y="2029968"/>
+            <a:ext cx="3474720" cy="1325880"/>
+          </a:xfrm>
+          <a:prstGeom prst="rect">
+            <a:avLst/>
+          </a:prstGeom>
+          <a:solidFill>
+            <a:srgbClr val="FFFFFF"/>
+          </a:solidFill>
+          <a:ln w="6350">
+            <a:solidFill>
+              <a:srgbClr val="B71C1C"/>
+            </a:solidFill>
+          </a:ln>
+        </p:spPr>
+        <p:style>
+          <a:lnRef idx="1">
+            <a:schemeClr val="accent1"/>
+          </a:lnRef>
+          <a:fillRef idx="3">
+            <a:schemeClr val="accent1"/>
+          </a:fillRef>
+          <a:effectRef idx="2">
+            <a:schemeClr val="accent1"/>
+          </a:effectRef>
+          <a:fontRef idx="minor">
+            <a:schemeClr val="lt1"/>
+          </a:fontRef>
+        </p:style>
+        <p:txBody>
+          <a:bodyPr rtlCol="0" anchor="ctr"/>
+          <a:lstStyle/>
+          <a:p>
+            <a:pPr algn="ctr"/>
+          </a:p>
+        </p:txBody>
+      </p:sp>
+      <p:sp>
+        <p:nvSpPr>
+          <p:cNvPr id="10" name="TextBox 9"/>
+          <p:cNvSpPr txBox="1"/>
+          <p:nvPr/>
+        </p:nvSpPr>
+        <p:spPr>
+          <a:xfrm>
+            <a:off x="502920" y="2084832"/>
+            <a:ext cx="3291840" cy="384048"/>
+          </a:xfrm>
+          <a:prstGeom prst="rect">
+            <a:avLst/>
+          </a:prstGeom>
+          <a:noFill/>
+        </p:spPr>
+        <p:txBody>
+          <a:bodyPr wrap="square">
+            <a:spAutoFit/>
+          </a:bodyPr>
+          <a:lstStyle/>
+          <a:p>
+            <a:pPr algn="l"/>
+            <a:r>
+              <a:rPr sz="1250" b="1" i="0">
+                <a:solidFill>
+                  <a:srgbClr val="B71C1C"/>
+                </a:solidFill>
+                <a:latin typeface="Calibri"/>
+              </a:rPr>
+              <a:t>Cotas CBO (Dirigente/Profissional)</a:t>
+            </a:r>
+          </a:p>
+        </p:txBody>
+      </p:sp>
+      <p:sp>
+        <p:nvSpPr>
+          <p:cNvPr id="11" name="TextBox 10"/>
+          <p:cNvSpPr txBox="1"/>
+          <p:nvPr/>
+        </p:nvSpPr>
+        <p:spPr>
+          <a:xfrm>
+            <a:off x="502920" y="2468880"/>
+            <a:ext cx="3291840" cy="347472"/>
+          </a:xfrm>
+          <a:prstGeom prst="rect">
+            <a:avLst/>
+          </a:prstGeom>
+          <a:noFill/>
+        </p:spPr>
+        <p:txBody>
+          <a:bodyPr wrap="square">
+            <a:spAutoFit/>
+          </a:bodyPr>
+          <a:lstStyle/>
+          <a:p>
+            <a:pPr algn="l"/>
+            <a:r>
+              <a:rPr sz="1150" b="0" i="0">
+                <a:solidFill>
+                  <a:srgbClr val="212121"/>
+                </a:solidFill>
+                <a:latin typeface="Calibri"/>
+              </a:rPr>
+              <a:t>meta IR &gt;= 0,80 ate 2030</a:t>
+            </a:r>
+          </a:p>
+        </p:txBody>
+      </p:sp>
+      <p:sp>
+        <p:nvSpPr>
+          <p:cNvPr id="12" name="TextBox 11"/>
+          <p:cNvSpPr txBox="1"/>
+          <p:nvPr/>
+        </p:nvSpPr>
+        <p:spPr>
+          <a:xfrm>
+            <a:off x="502920" y="2834640"/>
+            <a:ext cx="3291840" cy="384048"/>
+          </a:xfrm>
+          <a:prstGeom prst="rect">
+            <a:avLst/>
+          </a:prstGeom>
+          <a:noFill/>
+        </p:spPr>
+        <p:txBody>
+          <a:bodyPr wrap="square">
+            <a:spAutoFit/>
+          </a:bodyPr>
+          <a:lstStyle/>
+          <a:p>
+            <a:pPr algn="l"/>
+            <a:r>
+              <a:rPr sz="1050" b="0" i="1">
+                <a:solidFill>
+                  <a:srgbClr val="616161"/>
+                </a:solidFill>
+                <a:latin typeface="Calibri"/>
+              </a:rPr>
+              <a:t>principal canal: 83,8% do gap e composicao/acesso (Oaxaca)</a:t>
+            </a:r>
+          </a:p>
+        </p:txBody>
+      </p:sp>
+      <p:sp>
+        <p:nvSpPr>
+          <p:cNvPr id="13" name="Rectangle 12"/>
+          <p:cNvSpPr/>
+          <p:nvPr/>
+        </p:nvSpPr>
+        <p:spPr>
+          <a:xfrm>
+            <a:off x="411480" y="3493008"/>
+            <a:ext cx="3474720" cy="1325880"/>
+          </a:xfrm>
+          <a:prstGeom prst="rect">
+            <a:avLst/>
+          </a:prstGeom>
+          <a:solidFill>
+            <a:srgbClr val="FFFFFF"/>
+          </a:solidFill>
+          <a:ln w="6350">
+            <a:solidFill>
+              <a:srgbClr val="B71C1C"/>
+            </a:solidFill>
+          </a:ln>
+        </p:spPr>
+        <p:style>
+          <a:lnRef idx="1">
+            <a:schemeClr val="accent1"/>
+          </a:lnRef>
+          <a:fillRef idx="3">
+            <a:schemeClr val="accent1"/>
+          </a:fillRef>
+          <a:effectRef idx="2">
+            <a:schemeClr val="accent1"/>
+          </a:effectRef>
+          <a:fontRef idx="minor">
+            <a:schemeClr val="lt1"/>
+          </a:fontRef>
+        </p:style>
+        <p:txBody>
+          <a:bodyPr rtlCol="0" anchor="ctr"/>
+          <a:lstStyle/>
+          <a:p>
+            <a:pPr algn="ctr"/>
+          </a:p>
+        </p:txBody>
+      </p:sp>
+      <p:sp>
+        <p:nvSpPr>
+          <p:cNvPr id="14" name="TextBox 13"/>
+          <p:cNvSpPr txBox="1"/>
+          <p:nvPr/>
+        </p:nvSpPr>
+        <p:spPr>
+          <a:xfrm>
+            <a:off x="502920" y="3547872"/>
+            <a:ext cx="3291840" cy="384048"/>
+          </a:xfrm>
+          <a:prstGeom prst="rect">
+            <a:avLst/>
+          </a:prstGeom>
+          <a:noFill/>
+        </p:spPr>
+        <p:txBody>
+          <a:bodyPr wrap="square">
+            <a:spAutoFit/>
+          </a:bodyPr>
+          <a:lstStyle/>
+          <a:p>
+            <a:pPr algn="l"/>
+            <a:r>
+              <a:rPr sz="1250" b="1" i="0">
+                <a:solidFill>
+                  <a:srgbClr val="B71C1C"/>
+                </a:solidFill>
+                <a:latin typeface="Calibri"/>
+              </a:rPr>
+              <a:t>PRONATEC c/ recorte racial</a:t>
+            </a:r>
+          </a:p>
+        </p:txBody>
+      </p:sp>
+      <p:sp>
+        <p:nvSpPr>
+          <p:cNvPr id="15" name="TextBox 14"/>
+          <p:cNvSpPr txBox="1"/>
+          <p:nvPr/>
+        </p:nvSpPr>
+        <p:spPr>
+          <a:xfrm>
+            <a:off x="502920" y="3931920"/>
+            <a:ext cx="3291840" cy="347472"/>
+          </a:xfrm>
+          <a:prstGeom prst="rect">
+            <a:avLst/>
+          </a:prstGeom>
+          <a:noFill/>
+        </p:spPr>
+        <p:txBody>
+          <a:bodyPr wrap="square">
+            <a:spAutoFit/>
+          </a:bodyPr>
+          <a:lstStyle/>
+          <a:p>
+            <a:pPr algn="l"/>
+            <a:r>
+              <a:rPr sz="1150" b="0" i="0">
+                <a:solidFill>
+                  <a:srgbClr val="212121"/>
+                </a:solidFill>
+                <a:latin typeface="Calibri"/>
+              </a:rPr>
+              <a:t>subsidio de transporte em UPAs pobres</a:t>
+            </a:r>
+          </a:p>
+        </p:txBody>
+      </p:sp>
+      <p:sp>
+        <p:nvSpPr>
+          <p:cNvPr id="16" name="TextBox 15"/>
+          <p:cNvSpPr txBox="1"/>
+          <p:nvPr/>
+        </p:nvSpPr>
+        <p:spPr>
+          <a:xfrm>
+            <a:off x="502920" y="4297680"/>
+            <a:ext cx="3291840" cy="384048"/>
+          </a:xfrm>
+          <a:prstGeom prst="rect">
+            <a:avLst/>
+          </a:prstGeom>
+          <a:noFill/>
+        </p:spPr>
+        <p:txBody>
+          <a:bodyPr wrap="square">
+            <a:spAutoFit/>
+          </a:bodyPr>
+          <a:lstStyle/>
+          <a:p>
+            <a:pPr algn="l"/>
+            <a:r>
+              <a:rPr sz="1050" b="0" i="1">
+                <a:solidFill>
+                  <a:srgbClr val="616161"/>
+                </a:solidFill>
+                <a:latin typeface="Calibri"/>
+              </a:rPr>
+              <a:t>ataca segregacao residencial (52% do gap)</a:t>
+            </a:r>
+          </a:p>
+        </p:txBody>
+      </p:sp>
+      <p:sp>
+        <p:nvSpPr>
+          <p:cNvPr id="17" name="Rectangle 16"/>
+          <p:cNvSpPr/>
+          <p:nvPr/>
+        </p:nvSpPr>
+        <p:spPr>
+          <a:xfrm>
+            <a:off x="411480" y="4956048"/>
+            <a:ext cx="3474720" cy="1325880"/>
+          </a:xfrm>
+          <a:prstGeom prst="rect">
+            <a:avLst/>
+          </a:prstGeom>
+          <a:solidFill>
+            <a:srgbClr val="FFFFFF"/>
+          </a:solidFill>
+          <a:ln w="6350">
+            <a:solidFill>
+              <a:srgbClr val="B71C1C"/>
+            </a:solidFill>
+          </a:ln>
+        </p:spPr>
+        <p:style>
+          <a:lnRef idx="1">
+            <a:schemeClr val="accent1"/>
+          </a:lnRef>
+          <a:fillRef idx="3">
+            <a:schemeClr val="accent1"/>
+          </a:fillRef>
+          <a:effectRef idx="2">
+            <a:schemeClr val="accent1"/>
+          </a:effectRef>
+          <a:fontRef idx="minor">
+            <a:schemeClr val="lt1"/>
+          </a:fontRef>
+        </p:style>
+        <p:txBody>
+          <a:bodyPr rtlCol="0" anchor="ctr"/>
+          <a:lstStyle/>
+          <a:p>
+            <a:pPr algn="ctr"/>
+          </a:p>
+        </p:txBody>
+      </p:sp>
+      <p:sp>
+        <p:nvSpPr>
+          <p:cNvPr id="18" name="TextBox 17"/>
+          <p:cNvSpPr txBox="1"/>
+          <p:nvPr/>
+        </p:nvSpPr>
+        <p:spPr>
+          <a:xfrm>
+            <a:off x="502920" y="5010912"/>
+            <a:ext cx="3291840" cy="384048"/>
+          </a:xfrm>
+          <a:prstGeom prst="rect">
+            <a:avLst/>
+          </a:prstGeom>
+          <a:noFill/>
+        </p:spPr>
+        <p:txBody>
+          <a:bodyPr wrap="square">
+            <a:spAutoFit/>
+          </a:bodyPr>
+          <a:lstStyle/>
+          <a:p>
+            <a:pPr algn="l"/>
+            <a:r>
+              <a:rPr sz="1250" b="1" i="0">
+                <a:solidFill>
+                  <a:srgbClr val="B71C1C"/>
+                </a:solidFill>
+                <a:latin typeface="Calibri"/>
+              </a:rPr>
+              <a:t>Residencias em empresas de alta renda</a:t>
+            </a:r>
+          </a:p>
+        </p:txBody>
+      </p:sp>
+      <p:sp>
+        <p:nvSpPr>
+          <p:cNvPr id="19" name="TextBox 18"/>
+          <p:cNvSpPr txBox="1"/>
+          <p:nvPr/>
+        </p:nvSpPr>
+        <p:spPr>
+          <a:xfrm>
+            <a:off x="502920" y="5394960"/>
+            <a:ext cx="3291840" cy="347472"/>
+          </a:xfrm>
+          <a:prstGeom prst="rect">
+            <a:avLst/>
+          </a:prstGeom>
+          <a:noFill/>
+        </p:spPr>
+        <p:txBody>
+          <a:bodyPr wrap="square">
+            <a:spAutoFit/>
+          </a:bodyPr>
+          <a:lstStyle/>
+          <a:p>
+            <a:pPr algn="l"/>
+            <a:r>
+              <a:rPr sz="1150" b="0" i="0">
+                <a:solidFill>
+                  <a:srgbClr val="212121"/>
+                </a:solidFill>
+                <a:latin typeface="Calibri"/>
+              </a:rPr>
+              <a:t>bolsas para egressos negros</a:t>
+            </a:r>
+          </a:p>
+        </p:txBody>
+      </p:sp>
+      <p:sp>
+        <p:nvSpPr>
+          <p:cNvPr id="20" name="TextBox 19"/>
+          <p:cNvSpPr txBox="1"/>
+          <p:nvPr/>
+        </p:nvSpPr>
+        <p:spPr>
+          <a:xfrm>
+            <a:off x="502920" y="5760720"/>
+            <a:ext cx="3291840" cy="384048"/>
+          </a:xfrm>
+          <a:prstGeom prst="rect">
+            <a:avLst/>
+          </a:prstGeom>
+          <a:noFill/>
+        </p:spPr>
+        <p:txBody>
+          <a:bodyPr wrap="square">
+            <a:spAutoFit/>
+          </a:bodyPr>
+          <a:lstStyle/>
+          <a:p>
+            <a:pPr algn="l"/>
+            <a:r>
+              <a:rPr sz="1050" b="0" i="1">
+                <a:solidFill>
+                  <a:srgbClr val="616161"/>
+                </a:solidFill>
+                <a:latin typeface="Calibri"/>
+              </a:rPr>
+              <a:t>amplia o acesso a ocupacoes qualificadas</a:t>
+            </a:r>
+          </a:p>
+        </p:txBody>
+      </p:sp>
+      <p:sp>
+        <p:nvSpPr>
+          <p:cNvPr id="21" name="Rectangle 20"/>
+          <p:cNvSpPr/>
+          <p:nvPr/>
+        </p:nvSpPr>
+        <p:spPr>
+          <a:xfrm>
+            <a:off x="4251959" y="1481328"/>
+            <a:ext cx="3749039" cy="5074920"/>
+          </a:xfrm>
+          <a:prstGeom prst="rect">
+            <a:avLst/>
+          </a:prstGeom>
+          <a:solidFill>
+            <a:srgbClr val="F5F5F5"/>
+          </a:solidFill>
+          <a:ln w="25400">
+            <a:solidFill>
+              <a:srgbClr val="1565C0"/>
+            </a:solidFill>
+          </a:ln>
+        </p:spPr>
+        <p:style>
+          <a:lnRef idx="1">
+            <a:schemeClr val="accent1"/>
+          </a:lnRef>
+          <a:fillRef idx="3">
+            <a:schemeClr val="accent1"/>
+          </a:fillRef>
+          <a:effectRef idx="2">
+            <a:schemeClr val="accent1"/>
+          </a:effectRef>
+          <a:fontRef idx="minor">
+            <a:schemeClr val="lt1"/>
+          </a:fontRef>
+        </p:style>
+        <p:txBody>
+          <a:bodyPr rtlCol="0" anchor="ctr"/>
+          <a:lstStyle/>
+          <a:p>
+            <a:pPr algn="ctr"/>
+          </a:p>
+        </p:txBody>
+      </p:sp>
+      <p:sp>
+        <p:nvSpPr>
+          <p:cNvPr id="22" name="Rectangle 21"/>
+          <p:cNvSpPr/>
+          <p:nvPr/>
+        </p:nvSpPr>
+        <p:spPr>
+          <a:xfrm>
+            <a:off x="4251959" y="1481328"/>
+            <a:ext cx="3749039" cy="457200"/>
+          </a:xfrm>
+          <a:prstGeom prst="rect">
+            <a:avLst/>
+          </a:prstGeom>
+          <a:solidFill>
+            <a:srgbClr val="1565C0"/>
+          </a:solidFill>
+          <a:ln/>
+        </p:spPr>
+        <p:style>
+          <a:lnRef idx="1">
+            <a:schemeClr val="accent1"/>
+          </a:lnRef>
+          <a:fillRef idx="3">
+            <a:schemeClr val="accent1"/>
+          </a:fillRef>
+          <a:effectRef idx="2">
+            <a:schemeClr val="accent1"/>
+          </a:effectRef>
+          <a:fontRef idx="minor">
+            <a:schemeClr val="lt1"/>
+          </a:fontRef>
+        </p:style>
+        <p:txBody>
+          <a:bodyPr rtlCol="0" anchor="ctr"/>
+          <a:lstStyle/>
+          <a:p>
+            <a:pPr algn="ctr"/>
+          </a:p>
+        </p:txBody>
+      </p:sp>
+      <p:sp>
+        <p:nvSpPr>
+          <p:cNvPr id="23" name="TextBox 22"/>
+          <p:cNvSpPr txBox="1"/>
+          <p:nvPr/>
+        </p:nvSpPr>
+        <p:spPr>
+          <a:xfrm>
+            <a:off x="4389119" y="1517904"/>
+            <a:ext cx="3474720" cy="411480"/>
+          </a:xfrm>
+          <a:prstGeom prst="rect">
+            <a:avLst/>
+          </a:prstGeom>
+          <a:noFill/>
+        </p:spPr>
+        <p:txBody>
+          <a:bodyPr wrap="square">
+            <a:spAutoFit/>
+          </a:bodyPr>
+          <a:lstStyle/>
+          <a:p>
+            <a:pPr algn="l"/>
+            <a:r>
+              <a:rPr sz="1400" b="1" i="0">
+                <a:solidFill>
+                  <a:srgbClr val="FFFFFF"/>
+                </a:solidFill>
+                <a:latin typeface="Calibri"/>
+              </a:rPr>
+              <a:t>#2 — Remuneracao</a:t>
+            </a:r>
+          </a:p>
+        </p:txBody>
+      </p:sp>
+      <p:sp>
+        <p:nvSpPr>
+          <p:cNvPr id="24" name="Rectangle 23"/>
+          <p:cNvSpPr/>
+          <p:nvPr/>
+        </p:nvSpPr>
+        <p:spPr>
+          <a:xfrm>
+            <a:off x="4389119" y="2029968"/>
+            <a:ext cx="3474720" cy="1325880"/>
+          </a:xfrm>
+          <a:prstGeom prst="rect">
+            <a:avLst/>
+          </a:prstGeom>
+          <a:solidFill>
+            <a:srgbClr val="FFFFFF"/>
+          </a:solidFill>
+          <a:ln w="6350">
+            <a:solidFill>
+              <a:srgbClr val="1565C0"/>
+            </a:solidFill>
+          </a:ln>
+        </p:spPr>
+        <p:style>
+          <a:lnRef idx="1">
+            <a:schemeClr val="accent1"/>
+          </a:lnRef>
+          <a:fillRef idx="3">
+            <a:schemeClr val="accent1"/>
+          </a:fillRef>
+          <a:effectRef idx="2">
+            <a:schemeClr val="accent1"/>
+          </a:effectRef>
+          <a:fontRef idx="minor">
+            <a:schemeClr val="lt1"/>
+          </a:fontRef>
+        </p:style>
+        <p:txBody>
+          <a:bodyPr rtlCol="0" anchor="ctr"/>
+          <a:lstStyle/>
+          <a:p>
+            <a:pPr algn="ctr"/>
+          </a:p>
+        </p:txBody>
+      </p:sp>
+      <p:sp>
+        <p:nvSpPr>
+          <p:cNvPr id="25" name="TextBox 24"/>
+          <p:cNvSpPr txBox="1"/>
+          <p:nvPr/>
+        </p:nvSpPr>
+        <p:spPr>
+          <a:xfrm>
+            <a:off x="4480559" y="2084832"/>
+            <a:ext cx="3291840" cy="384048"/>
+          </a:xfrm>
+          <a:prstGeom prst="rect">
+            <a:avLst/>
+          </a:prstGeom>
+          <a:noFill/>
+        </p:spPr>
+        <p:txBody>
+          <a:bodyPr wrap="square">
+            <a:spAutoFit/>
+          </a:bodyPr>
+          <a:lstStyle/>
+          <a:p>
+            <a:pPr algn="l"/>
+            <a:r>
+              <a:rPr sz="1250" b="1" i="0">
+                <a:solidFill>
+                  <a:srgbClr val="1565C0"/>
+                </a:solidFill>
+                <a:latin typeface="Calibri"/>
+              </a:rPr>
+              <a:t>Transparencia salarial por raca/genero</a:t>
+            </a:r>
+          </a:p>
+        </p:txBody>
+      </p:sp>
+      <p:sp>
+        <p:nvSpPr>
+          <p:cNvPr id="26" name="TextBox 25"/>
+          <p:cNvSpPr txBox="1"/>
+          <p:nvPr/>
+        </p:nvSpPr>
+        <p:spPr>
+          <a:xfrm>
+            <a:off x="4480559" y="2468880"/>
+            <a:ext cx="3291840" cy="347472"/>
+          </a:xfrm>
+          <a:prstGeom prst="rect">
+            <a:avLst/>
+          </a:prstGeom>
+          <a:noFill/>
+        </p:spPr>
+        <p:txBody>
+          <a:bodyPr wrap="square">
+            <a:spAutoFit/>
+          </a:bodyPr>
+          <a:lstStyle/>
+          <a:p>
+            <a:pPr algn="l"/>
+            <a:r>
+              <a:rPr sz="1150" b="0" i="0">
+                <a:solidFill>
+                  <a:srgbClr val="212121"/>
+                </a:solidFill>
+                <a:latin typeface="Calibri"/>
+              </a:rPr>
+              <a:t>obrigatoria para empresas &gt;100 func.</a:t>
+            </a:r>
+          </a:p>
+        </p:txBody>
+      </p:sp>
+      <p:sp>
+        <p:nvSpPr>
+          <p:cNvPr id="27" name="TextBox 26"/>
+          <p:cNvSpPr txBox="1"/>
+          <p:nvPr/>
+        </p:nvSpPr>
+        <p:spPr>
+          <a:xfrm>
+            <a:off x="4480559" y="2834640"/>
+            <a:ext cx="3291840" cy="384048"/>
+          </a:xfrm>
+          <a:prstGeom prst="rect">
+            <a:avLst/>
+          </a:prstGeom>
+          <a:noFill/>
+        </p:spPr>
+        <p:txBody>
+          <a:bodyPr wrap="square">
+            <a:spAutoFit/>
+          </a:bodyPr>
+          <a:lstStyle/>
+          <a:p>
+            <a:pPr algn="l"/>
+            <a:r>
+              <a:rPr sz="1050" b="0" i="1">
+                <a:solidFill>
+                  <a:srgbClr val="616161"/>
+                </a:solidFill>
+                <a:latin typeface="Calibri"/>
+              </a:rPr>
+              <a:t>visa o gap residual de 6,2% (HLM M4)</a:t>
+            </a:r>
+          </a:p>
+        </p:txBody>
+      </p:sp>
+      <p:sp>
+        <p:nvSpPr>
+          <p:cNvPr id="28" name="Rectangle 27"/>
+          <p:cNvSpPr/>
+          <p:nvPr/>
+        </p:nvSpPr>
+        <p:spPr>
+          <a:xfrm>
+            <a:off x="4389119" y="3493008"/>
+            <a:ext cx="3474720" cy="1325880"/>
+          </a:xfrm>
+          <a:prstGeom prst="rect">
+            <a:avLst/>
+          </a:prstGeom>
+          <a:solidFill>
+            <a:srgbClr val="FFFFFF"/>
+          </a:solidFill>
+          <a:ln w="6350">
+            <a:solidFill>
+              <a:srgbClr val="1565C0"/>
+            </a:solidFill>
+          </a:ln>
+        </p:spPr>
+        <p:style>
+          <a:lnRef idx="1">
+            <a:schemeClr val="accent1"/>
+          </a:lnRef>
+          <a:fillRef idx="3">
+            <a:schemeClr val="accent1"/>
+          </a:fillRef>
+          <a:effectRef idx="2">
+            <a:schemeClr val="accent1"/>
+          </a:effectRef>
+          <a:fontRef idx="minor">
+            <a:schemeClr val="lt1"/>
+          </a:fontRef>
+        </p:style>
+        <p:txBody>
+          <a:bodyPr rtlCol="0" anchor="ctr"/>
+          <a:lstStyle/>
+          <a:p>
+            <a:pPr algn="ctr"/>
+          </a:p>
+        </p:txBody>
+      </p:sp>
+      <p:sp>
+        <p:nvSpPr>
+          <p:cNvPr id="29" name="TextBox 28"/>
+          <p:cNvSpPr txBox="1"/>
+          <p:nvPr/>
+        </p:nvSpPr>
+        <p:spPr>
+          <a:xfrm>
+            <a:off x="4480559" y="3547872"/>
+            <a:ext cx="3291840" cy="384048"/>
+          </a:xfrm>
+          <a:prstGeom prst="rect">
+            <a:avLst/>
+          </a:prstGeom>
+          <a:noFill/>
+        </p:spPr>
+        <p:txBody>
+          <a:bodyPr wrap="square">
+            <a:spAutoFit/>
+          </a:bodyPr>
+          <a:lstStyle/>
+          <a:p>
+            <a:pPr algn="l"/>
+            <a:r>
+              <a:rPr sz="1250" b="1" i="0">
+                <a:solidFill>
+                  <a:srgbClr val="1565C0"/>
+                </a:solidFill>
+                <a:latin typeface="Calibri"/>
+              </a:rPr>
+              <a:t>Auditoria de igual pagamento</a:t>
+            </a:r>
+          </a:p>
+        </p:txBody>
+      </p:sp>
+      <p:sp>
+        <p:nvSpPr>
+          <p:cNvPr id="30" name="TextBox 29"/>
+          <p:cNvSpPr txBox="1"/>
+          <p:nvPr/>
+        </p:nvSpPr>
+        <p:spPr>
+          <a:xfrm>
+            <a:off x="4480559" y="3931920"/>
+            <a:ext cx="3291840" cy="347472"/>
+          </a:xfrm>
+          <a:prstGeom prst="rect">
+            <a:avLst/>
+          </a:prstGeom>
+          <a:noFill/>
+        </p:spPr>
+        <p:txBody>
+          <a:bodyPr wrap="square">
+            <a:spAutoFit/>
+          </a:bodyPr>
+          <a:lstStyle/>
+          <a:p>
+            <a:pPr algn="l"/>
+            <a:r>
+              <a:rPr sz="1150" b="0" i="0">
+                <a:solidFill>
+                  <a:srgbClr val="212121"/>
+                </a:solidFill>
+                <a:latin typeface="Calibri"/>
+              </a:rPr>
+              <a:t>penalidades progressivas</a:t>
+            </a:r>
+          </a:p>
+        </p:txBody>
+      </p:sp>
+      <p:sp>
+        <p:nvSpPr>
+          <p:cNvPr id="31" name="TextBox 30"/>
+          <p:cNvSpPr txBox="1"/>
+          <p:nvPr/>
+        </p:nvSpPr>
+        <p:spPr>
+          <a:xfrm>
+            <a:off x="4480559" y="4297680"/>
+            <a:ext cx="3291840" cy="384048"/>
+          </a:xfrm>
+          <a:prstGeom prst="rect">
+            <a:avLst/>
+          </a:prstGeom>
+          <a:noFill/>
+        </p:spPr>
+        <p:txBody>
+          <a:bodyPr wrap="square">
+            <a:spAutoFit/>
+          </a:bodyPr>
+          <a:lstStyle/>
+          <a:p>
+            <a:pPr algn="l"/>
+            <a:r>
+              <a:rPr sz="1050" b="0" i="1">
+                <a:solidFill>
+                  <a:srgbClr val="616161"/>
+                </a:solidFill>
+                <a:latin typeface="Calibri"/>
+              </a:rPr>
+              <a:t>enforcement direto do sticky floor (q10=33%)</a:t>
+            </a:r>
+          </a:p>
+        </p:txBody>
+      </p:sp>
+      <p:sp>
+        <p:nvSpPr>
+          <p:cNvPr id="32" name="Rectangle 31"/>
+          <p:cNvSpPr/>
+          <p:nvPr/>
+        </p:nvSpPr>
+        <p:spPr>
+          <a:xfrm>
+            <a:off x="4389119" y="4956048"/>
+            <a:ext cx="3474720" cy="1325880"/>
+          </a:xfrm>
+          <a:prstGeom prst="rect">
+            <a:avLst/>
+          </a:prstGeom>
+          <a:solidFill>
+            <a:srgbClr val="FFFFFF"/>
+          </a:solidFill>
+          <a:ln w="6350">
+            <a:solidFill>
+              <a:srgbClr val="1565C0"/>
+            </a:solidFill>
+          </a:ln>
+        </p:spPr>
+        <p:style>
+          <a:lnRef idx="1">
+            <a:schemeClr val="accent1"/>
+          </a:lnRef>
+          <a:fillRef idx="3">
+            <a:schemeClr val="accent1"/>
+          </a:fillRef>
+          <a:effectRef idx="2">
+            <a:schemeClr val="accent1"/>
+          </a:effectRef>
+          <a:fontRef idx="minor">
+            <a:schemeClr val="lt1"/>
+          </a:fontRef>
+        </p:style>
+        <p:txBody>
+          <a:bodyPr rtlCol="0" anchor="ctr"/>
+          <a:lstStyle/>
+          <a:p>
+            <a:pPr algn="ctr"/>
+          </a:p>
+        </p:txBody>
+      </p:sp>
+      <p:sp>
+        <p:nvSpPr>
+          <p:cNvPr id="33" name="TextBox 32"/>
+          <p:cNvSpPr txBox="1"/>
+          <p:nvPr/>
+        </p:nvSpPr>
+        <p:spPr>
+          <a:xfrm>
+            <a:off x="4480559" y="5010912"/>
+            <a:ext cx="3291840" cy="384048"/>
+          </a:xfrm>
+          <a:prstGeom prst="rect">
+            <a:avLst/>
+          </a:prstGeom>
+          <a:noFill/>
+        </p:spPr>
+        <p:txBody>
+          <a:bodyPr wrap="square">
+            <a:spAutoFit/>
+          </a:bodyPr>
+          <a:lstStyle/>
+          <a:p>
+            <a:pPr algn="l"/>
+            <a:r>
+              <a:rPr sz="1250" b="1" i="0">
+                <a:solidFill>
+                  <a:srgbClr val="1565C0"/>
+                </a:solidFill>
+                <a:latin typeface="Calibri"/>
+              </a:rPr>
+              <a:t>Piso salarial nas categorias de maior gap</a:t>
+            </a:r>
+          </a:p>
+        </p:txBody>
+      </p:sp>
+      <p:sp>
+        <p:nvSpPr>
+          <p:cNvPr id="34" name="TextBox 33"/>
+          <p:cNvSpPr txBox="1"/>
+          <p:nvPr/>
+        </p:nvSpPr>
+        <p:spPr>
+          <a:xfrm>
+            <a:off x="4480559" y="5394960"/>
+            <a:ext cx="3291840" cy="347472"/>
+          </a:xfrm>
+          <a:prstGeom prst="rect">
+            <a:avLst/>
+          </a:prstGeom>
+          <a:noFill/>
+        </p:spPr>
+        <p:txBody>
+          <a:bodyPr wrap="square">
+            <a:spAutoFit/>
+          </a:bodyPr>
+          <a:lstStyle/>
+          <a:p>
+            <a:pPr algn="l"/>
+            <a:r>
+              <a:rPr sz="1150" b="0" i="0">
+                <a:solidFill>
+                  <a:srgbClr val="212121"/>
+                </a:solidFill>
+                <a:latin typeface="Calibri"/>
+              </a:rPr>
+              <a:t>indexado ao gap HLM M4</a:t>
+            </a:r>
+          </a:p>
+        </p:txBody>
+      </p:sp>
+      <p:sp>
+        <p:nvSpPr>
+          <p:cNvPr id="35" name="TextBox 34"/>
+          <p:cNvSpPr txBox="1"/>
+          <p:nvPr/>
+        </p:nvSpPr>
+        <p:spPr>
+          <a:xfrm>
+            <a:off x="4480559" y="5760720"/>
+            <a:ext cx="3291840" cy="384048"/>
+          </a:xfrm>
+          <a:prstGeom prst="rect">
+            <a:avLst/>
+          </a:prstGeom>
+          <a:noFill/>
+        </p:spPr>
+        <p:txBody>
+          <a:bodyPr wrap="square">
+            <a:spAutoFit/>
+          </a:bodyPr>
+          <a:lstStyle/>
+          <a:p>
+            <a:pPr algn="l"/>
+            <a:r>
+              <a:rPr sz="1050" b="0" i="1">
+                <a:solidFill>
+                  <a:srgbClr val="616161"/>
+                </a:solidFill>
+                <a:latin typeface="Calibri"/>
+              </a:rPr>
+              <a:t>protecao prioritaria para trabalhadores da base</a:t>
+            </a:r>
+          </a:p>
+        </p:txBody>
+      </p:sp>
+      <p:sp>
+        <p:nvSpPr>
+          <p:cNvPr id="36" name="Rectangle 35"/>
+          <p:cNvSpPr/>
+          <p:nvPr/>
+        </p:nvSpPr>
+        <p:spPr>
+          <a:xfrm>
+            <a:off x="8229598" y="1481328"/>
+            <a:ext cx="3749039" cy="5074920"/>
           </a:xfrm>
           <a:prstGeom prst="rect">
             <a:avLst/>
@@ -11740,13 +12869,13 @@
       </p:sp>
       <p:sp>
         <p:nvSpPr>
-          <p:cNvPr id="7" name="Rectangle 6"/>
+          <p:cNvPr id="37" name="Rectangle 36"/>
           <p:cNvSpPr/>
           <p:nvPr/>
         </p:nvSpPr>
         <p:spPr>
           <a:xfrm>
-            <a:off x="274320" y="1508760"/>
+            <a:off x="8229598" y="1481328"/>
             <a:ext cx="3749039" cy="457200"/>
           </a:xfrm>
           <a:prstGeom prst="rect">
@@ -11781,13 +12910,13 @@
       </p:sp>
       <p:sp>
         <p:nvSpPr>
-          <p:cNvPr id="8" name="TextBox 7"/>
-          <p:cNvSpPr txBox="1"/>
-          <p:nvPr/>
-        </p:nvSpPr>
-        <p:spPr>
-          <a:xfrm>
-            <a:off x="411480" y="1545336"/>
+          <p:cNvPr id="38" name="TextBox 37"/>
+          <p:cNvSpPr txBox="1"/>
+          <p:nvPr/>
+        </p:nvSpPr>
+        <p:spPr>
+          <a:xfrm>
+            <a:off x="8366758" y="1517904"/>
             <a:ext cx="3474720" cy="411480"/>
           </a:xfrm>
           <a:prstGeom prst="rect">
@@ -11803,105 +12932,39 @@
           <a:p>
             <a:pPr algn="l"/>
             <a:r>
-              <a:rPr sz="1300" b="1" i="0">
+              <a:rPr sz="1400" b="1" i="0">
                 <a:solidFill>
                   <a:srgbClr val="FFFFFF"/>
                 </a:solidFill>
                 <a:latin typeface="Calibri"/>
               </a:rPr>
-              <a:t>Konfound (Frank, 2013)</a:t>
-            </a:r>
-          </a:p>
-        </p:txBody>
-      </p:sp>
-      <p:sp>
-        <p:nvSpPr>
-          <p:cNvPr id="9" name="TextBox 8"/>
-          <p:cNvSpPr txBox="1"/>
-          <p:nvPr/>
-        </p:nvSpPr>
-        <p:spPr>
-          <a:xfrm>
-            <a:off x="411480" y="2084831"/>
-            <a:ext cx="3474720" cy="594360"/>
-          </a:xfrm>
-          <a:prstGeom prst="rect">
-            <a:avLst/>
-          </a:prstGeom>
-          <a:noFill/>
-        </p:spPr>
-        <p:txBody>
-          <a:bodyPr wrap="square">
-            <a:spAutoFit/>
-          </a:bodyPr>
-          <a:lstStyle/>
-          <a:p>
-            <a:pPr algn="ctr"/>
-            <a:r>
-              <a:rPr sz="2600" b="1" i="0">
-                <a:solidFill>
-                  <a:srgbClr val="1F3864"/>
-                </a:solidFill>
-                <a:latin typeface="Calibri"/>
-              </a:rPr>
-              <a:t>99,5% dos casos</a:t>
-            </a:r>
-          </a:p>
-        </p:txBody>
-      </p:sp>
-      <p:sp>
-        <p:nvSpPr>
-          <p:cNvPr id="10" name="TextBox 9"/>
-          <p:cNvSpPr txBox="1"/>
-          <p:nvPr/>
-        </p:nvSpPr>
-        <p:spPr>
-          <a:xfrm>
-            <a:off x="411480" y="2743200"/>
-            <a:ext cx="3474720" cy="1005840"/>
-          </a:xfrm>
-          <a:prstGeom prst="rect">
-            <a:avLst/>
-          </a:prstGeom>
-          <a:noFill/>
-        </p:spPr>
-        <p:txBody>
-          <a:bodyPr wrap="square">
-            <a:spAutoFit/>
-          </a:bodyPr>
-          <a:lstStyle/>
-          <a:p>
-            <a:pPr algn="l"/>
-            <a:r>
-              <a:rPr sz="1300" b="0" i="0">
-                <a:solidFill>
-                  <a:srgbClr val="212121"/>
-                </a:solidFill>
-                <a:latin typeface="Calibri"/>
-              </a:rPr>
-              <a:t>precisariam ser removidos ou alterados para anular o resultado</a:t>
-            </a:r>
-          </a:p>
-        </p:txBody>
-      </p:sp>
-      <p:sp>
-        <p:nvSpPr>
-          <p:cNvPr id="11" name="Rectangle 10"/>
+              <a:t>#3 — Inclusao e Mentoria</a:t>
+            </a:r>
+          </a:p>
+        </p:txBody>
+      </p:sp>
+      <p:sp>
+        <p:nvSpPr>
+          <p:cNvPr id="39" name="Rectangle 38"/>
           <p:cNvSpPr/>
           <p:nvPr/>
         </p:nvSpPr>
         <p:spPr>
           <a:xfrm>
-            <a:off x="320040" y="3822191"/>
-            <a:ext cx="3657600" cy="27432"/>
+            <a:off x="8366758" y="2029968"/>
+            <a:ext cx="3474720" cy="1325880"/>
           </a:xfrm>
           <a:prstGeom prst="rect">
             <a:avLst/>
           </a:prstGeom>
           <a:solidFill>
-            <a:srgbClr val="616161"/>
+            <a:srgbClr val="FFFFFF"/>
           </a:solidFill>
-          <a:ln/>
+          <a:ln w="6350">
+            <a:solidFill>
+              <a:srgbClr val="1F3864"/>
+            </a:solidFill>
+          </a:ln>
         </p:spPr>
         <p:style>
           <a:lnRef idx="1">
@@ -11927,14 +12990,14 @@
       </p:sp>
       <p:sp>
         <p:nvSpPr>
-          <p:cNvPr id="12" name="TextBox 11"/>
-          <p:cNvSpPr txBox="1"/>
-          <p:nvPr/>
-        </p:nvSpPr>
-        <p:spPr>
-          <a:xfrm>
-            <a:off x="411480" y="3886200"/>
-            <a:ext cx="3474720" cy="1005840"/>
+          <p:cNvPr id="40" name="TextBox 39"/>
+          <p:cNvSpPr txBox="1"/>
+          <p:nvPr/>
+        </p:nvSpPr>
+        <p:spPr>
+          <a:xfrm>
+            <a:off x="8458198" y="2084832"/>
+            <a:ext cx="3291840" cy="384048"/>
           </a:xfrm>
           <a:prstGeom prst="rect">
             <a:avLst/>
@@ -11949,37 +13012,107 @@
           <a:p>
             <a:pPr algn="l"/>
             <a:r>
-              <a:rPr sz="1150" b="0" i="1">
+              <a:rPr sz="1250" b="1" i="0">
+                <a:solidFill>
+                  <a:srgbClr val="1F3864"/>
+                </a:solidFill>
+                <a:latin typeface="Calibri"/>
+              </a:rPr>
+              <a:t>Mentoria estruturada por empresas</a:t>
+            </a:r>
+          </a:p>
+        </p:txBody>
+      </p:sp>
+      <p:sp>
+        <p:nvSpPr>
+          <p:cNvPr id="41" name="TextBox 40"/>
+          <p:cNvSpPr txBox="1"/>
+          <p:nvPr/>
+        </p:nvSpPr>
+        <p:spPr>
+          <a:xfrm>
+            <a:off x="8458198" y="2468880"/>
+            <a:ext cx="3291840" cy="347472"/>
+          </a:xfrm>
+          <a:prstGeom prst="rect">
+            <a:avLst/>
+          </a:prstGeom>
+          <a:noFill/>
+        </p:spPr>
+        <p:txBody>
+          <a:bodyPr wrap="square">
+            <a:spAutoFit/>
+          </a:bodyPr>
+          <a:lstStyle/>
+          <a:p>
+            <a:pPr algn="l"/>
+            <a:r>
+              <a:rPr sz="1150" b="0" i="0">
+                <a:solidFill>
+                  <a:srgbClr val="212121"/>
+                </a:solidFill>
+                <a:latin typeface="Calibri"/>
+              </a:rPr>
+              <a:t>acesso a redes profissionais qualificadas</a:t>
+            </a:r>
+          </a:p>
+        </p:txBody>
+      </p:sp>
+      <p:sp>
+        <p:nvSpPr>
+          <p:cNvPr id="42" name="TextBox 41"/>
+          <p:cNvSpPr txBox="1"/>
+          <p:nvPr/>
+        </p:nvSpPr>
+        <p:spPr>
+          <a:xfrm>
+            <a:off x="8458198" y="2834640"/>
+            <a:ext cx="3291840" cy="384048"/>
+          </a:xfrm>
+          <a:prstGeom prst="rect">
+            <a:avLst/>
+          </a:prstGeom>
+          <a:noFill/>
+        </p:spPr>
+        <p:txBody>
+          <a:bodyPr wrap="square">
+            <a:spAutoFit/>
+          </a:bodyPr>
+          <a:lstStyle/>
+          <a:p>
+            <a:pPr algn="l"/>
+            <a:r>
+              <a:rPr sz="1050" b="0" i="1">
                 <a:solidFill>
                   <a:srgbClr val="616161"/>
                 </a:solidFill>
                 <a:latin typeface="Calibri"/>
               </a:rPr>
-              <a:t>Como referencia: um confundidor assim nunca existiu em Ciencias Sociais</a:t>
-            </a:r>
-          </a:p>
-        </p:txBody>
-      </p:sp>
-      <p:sp>
-        <p:nvSpPr>
-          <p:cNvPr id="13" name="Rectangle 12"/>
+              <a:t>converte o diploma negro em oportunidade de carreira</a:t>
+            </a:r>
+          </a:p>
+        </p:txBody>
+      </p:sp>
+      <p:sp>
+        <p:nvSpPr>
+          <p:cNvPr id="43" name="Rectangle 42"/>
           <p:cNvSpPr/>
           <p:nvPr/>
         </p:nvSpPr>
         <p:spPr>
           <a:xfrm>
-            <a:off x="4251959" y="1508760"/>
-            <a:ext cx="3749039" cy="4434840"/>
+            <a:off x="8366758" y="3493008"/>
+            <a:ext cx="3474720" cy="1325880"/>
           </a:xfrm>
           <a:prstGeom prst="rect">
             <a:avLst/>
           </a:prstGeom>
           <a:solidFill>
-            <a:srgbClr val="F5F5F5"/>
+            <a:srgbClr val="FFFFFF"/>
           </a:solidFill>
-          <a:ln w="25400">
+          <a:ln w="6350">
             <a:solidFill>
-              <a:srgbClr val="B71C1C"/>
+              <a:srgbClr val="1F3864"/>
             </a:solidFill>
           </a:ln>
         </p:spPr>
@@ -12007,22 +13140,131 @@
       </p:sp>
       <p:sp>
         <p:nvSpPr>
-          <p:cNvPr id="14" name="Rectangle 13"/>
+          <p:cNvPr id="44" name="TextBox 43"/>
+          <p:cNvSpPr txBox="1"/>
+          <p:nvPr/>
+        </p:nvSpPr>
+        <p:spPr>
+          <a:xfrm>
+            <a:off x="8458198" y="3547872"/>
+            <a:ext cx="3291840" cy="384048"/>
+          </a:xfrm>
+          <a:prstGeom prst="rect">
+            <a:avLst/>
+          </a:prstGeom>
+          <a:noFill/>
+        </p:spPr>
+        <p:txBody>
+          <a:bodyPr wrap="square">
+            <a:spAutoFit/>
+          </a:bodyPr>
+          <a:lstStyle/>
+          <a:p>
+            <a:pPr algn="l"/>
+            <a:r>
+              <a:rPr sz="1250" b="1" i="0">
+                <a:solidFill>
+                  <a:srgbClr val="1F3864"/>
+                </a:solidFill>
+                <a:latin typeface="Calibri"/>
+              </a:rPr>
+              <a:t>30% DAS e liderancas corporativas</a:t>
+            </a:r>
+          </a:p>
+        </p:txBody>
+      </p:sp>
+      <p:sp>
+        <p:nvSpPr>
+          <p:cNvPr id="45" name="TextBox 44"/>
+          <p:cNvSpPr txBox="1"/>
+          <p:nvPr/>
+        </p:nvSpPr>
+        <p:spPr>
+          <a:xfrm>
+            <a:off x="8458198" y="3931920"/>
+            <a:ext cx="3291840" cy="347472"/>
+          </a:xfrm>
+          <a:prstGeom prst="rect">
+            <a:avLst/>
+          </a:prstGeom>
+          <a:noFill/>
+        </p:spPr>
+        <p:txBody>
+          <a:bodyPr wrap="square">
+            <a:spAutoFit/>
+          </a:bodyPr>
+          <a:lstStyle/>
+          <a:p>
+            <a:pPr algn="l"/>
+            <a:r>
+              <a:rPr sz="1150" b="0" i="0">
+                <a:solidFill>
+                  <a:srgbClr val="212121"/>
+                </a:solidFill>
+                <a:latin typeface="Calibri"/>
+              </a:rPr>
+              <a:t>reserva para negros ate 2030</a:t>
+            </a:r>
+          </a:p>
+        </p:txBody>
+      </p:sp>
+      <p:sp>
+        <p:nvSpPr>
+          <p:cNvPr id="46" name="TextBox 45"/>
+          <p:cNvSpPr txBox="1"/>
+          <p:nvPr/>
+        </p:nvSpPr>
+        <p:spPr>
+          <a:xfrm>
+            <a:off x="8458198" y="4297680"/>
+            <a:ext cx="3291840" cy="384048"/>
+          </a:xfrm>
+          <a:prstGeom prst="rect">
+            <a:avLst/>
+          </a:prstGeom>
+          <a:noFill/>
+        </p:spPr>
+        <p:txBody>
+          <a:bodyPr wrap="square">
+            <a:spAutoFit/>
+          </a:bodyPr>
+          <a:lstStyle/>
+          <a:p>
+            <a:pPr algn="l"/>
+            <a:r>
+              <a:rPr sz="1050" b="0" i="1">
+                <a:solidFill>
+                  <a:srgbClr val="616161"/>
+                </a:solidFill>
+                <a:latin typeface="Calibri"/>
+              </a:rPr>
+              <a:t>inclusao nas redes de decisao (glass ceiling)</a:t>
+            </a:r>
+          </a:p>
+        </p:txBody>
+      </p:sp>
+      <p:sp>
+        <p:nvSpPr>
+          <p:cNvPr id="47" name="Rectangle 46"/>
           <p:cNvSpPr/>
           <p:nvPr/>
         </p:nvSpPr>
         <p:spPr>
           <a:xfrm>
-            <a:off x="4251959" y="1508760"/>
-            <a:ext cx="3749039" cy="457200"/>
+            <a:off x="8366758" y="4956048"/>
+            <a:ext cx="3474720" cy="1325880"/>
           </a:xfrm>
           <a:prstGeom prst="rect">
             <a:avLst/>
           </a:prstGeom>
           <a:solidFill>
-            <a:srgbClr val="B71C1C"/>
+            <a:srgbClr val="FFFFFF"/>
           </a:solidFill>
-          <a:ln/>
+          <a:ln w="6350">
+            <a:solidFill>
+              <a:srgbClr val="1F3864"/>
+            </a:solidFill>
+          </a:ln>
         </p:spPr>
         <p:style>
           <a:lnRef idx="1">
@@ -12048,14 +13290,14 @@
       </p:sp>
       <p:sp>
         <p:nvSpPr>
-          <p:cNvPr id="15" name="TextBox 14"/>
-          <p:cNvSpPr txBox="1"/>
-          <p:nvPr/>
-        </p:nvSpPr>
-        <p:spPr>
-          <a:xfrm>
-            <a:off x="4389119" y="1545336"/>
-            <a:ext cx="3474720" cy="411480"/>
+          <p:cNvPr id="48" name="TextBox 47"/>
+          <p:cNvSpPr txBox="1"/>
+          <p:nvPr/>
+        </p:nvSpPr>
+        <p:spPr>
+          <a:xfrm>
+            <a:off x="8458198" y="5010912"/>
+            <a:ext cx="3291840" cy="384048"/>
           </a:xfrm>
           <a:prstGeom prst="rect">
             <a:avLst/>
@@ -12070,62 +13312,27 @@
           <a:p>
             <a:pPr algn="l"/>
             <a:r>
-              <a:rPr sz="1300" b="1" i="0">
-                <a:solidFill>
-                  <a:srgbClr val="FFFFFF"/>
-                </a:solidFill>
-                <a:latin typeface="Calibri"/>
-              </a:rPr>
-              <a:t>E-values (VanderWeele, 2017)</a:t>
-            </a:r>
-          </a:p>
-        </p:txBody>
-      </p:sp>
-      <p:sp>
-        <p:nvSpPr>
-          <p:cNvPr id="16" name="TextBox 15"/>
-          <p:cNvSpPr txBox="1"/>
-          <p:nvPr/>
-        </p:nvSpPr>
-        <p:spPr>
-          <a:xfrm>
-            <a:off x="4389119" y="2084831"/>
-            <a:ext cx="3474720" cy="594360"/>
-          </a:xfrm>
-          <a:prstGeom prst="rect">
-            <a:avLst/>
-          </a:prstGeom>
-          <a:noFill/>
-        </p:spPr>
-        <p:txBody>
-          <a:bodyPr wrap="square">
-            <a:spAutoFit/>
-          </a:bodyPr>
-          <a:lstStyle/>
-          <a:p>
-            <a:pPr algn="ctr"/>
-            <a:r>
-              <a:rPr sz="2600" b="1" i="0">
-                <a:solidFill>
-                  <a:srgbClr val="B71C1C"/>
-                </a:solidFill>
-                <a:latin typeface="Calibri"/>
-              </a:rPr>
-              <a:t>E &gt;= 2,24x</a:t>
-            </a:r>
-          </a:p>
-        </p:txBody>
-      </p:sp>
-      <p:sp>
-        <p:nvSpPr>
-          <p:cNvPr id="17" name="TextBox 16"/>
-          <p:cNvSpPr txBox="1"/>
-          <p:nvPr/>
-        </p:nvSpPr>
-        <p:spPr>
-          <a:xfrm>
-            <a:off x="4389119" y="2743200"/>
-            <a:ext cx="3474720" cy="1005840"/>
+              <a:rPr sz="1250" b="1" i="0">
+                <a:solidFill>
+                  <a:srgbClr val="1F3864"/>
+                </a:solidFill>
+                <a:latin typeface="Calibri"/>
+              </a:rPr>
+              <a:t>Equidade educacional de qualidade</a:t>
+            </a:r>
+          </a:p>
+        </p:txBody>
+      </p:sp>
+      <p:sp>
+        <p:nvSpPr>
+          <p:cNvPr id="49" name="TextBox 48"/>
+          <p:cNvSpPr txBox="1"/>
+          <p:nvPr/>
+        </p:nvSpPr>
+        <p:spPr>
+          <a:xfrm>
+            <a:off x="8458198" y="5394960"/>
+            <a:ext cx="3291840" cy="347472"/>
           </a:xfrm>
           <a:prstGeom prst="rect">
             <a:avLst/>
@@ -12140,33 +13347,68 @@
           <a:p>
             <a:pPr algn="l"/>
             <a:r>
-              <a:rPr sz="1300" b="0" i="0">
+              <a:rPr sz="1150" b="0" i="0">
                 <a:solidFill>
                   <a:srgbClr val="212121"/>
                 </a:solidFill>
                 <a:latin typeface="Calibri"/>
               </a:rPr>
-              <a:t>de associacao com raca E com ocupacao simultaneamente</a:t>
-            </a:r>
-          </a:p>
-        </p:txBody>
-      </p:sp>
-      <p:sp>
-        <p:nvSpPr>
-          <p:cNvPr id="18" name="Rectangle 17"/>
+              <a:t>nao apenas de acesso</a:t>
+            </a:r>
+          </a:p>
+        </p:txBody>
+      </p:sp>
+      <p:sp>
+        <p:nvSpPr>
+          <p:cNvPr id="50" name="TextBox 49"/>
+          <p:cNvSpPr txBox="1"/>
+          <p:nvPr/>
+        </p:nvSpPr>
+        <p:spPr>
+          <a:xfrm>
+            <a:off x="8458198" y="5760720"/>
+            <a:ext cx="3291840" cy="384048"/>
+          </a:xfrm>
+          <a:prstGeom prst="rect">
+            <a:avLst/>
+          </a:prstGeom>
+          <a:noFill/>
+        </p:spPr>
+        <p:txBody>
+          <a:bodyPr wrap="square">
+            <a:spAutoFit/>
+          </a:bodyPr>
+          <a:lstStyle/>
+          <a:p>
+            <a:pPr algn="l"/>
+            <a:r>
+              <a:rPr sz="1050" b="0" i="1">
+                <a:solidFill>
+                  <a:srgbClr val="616161"/>
+                </a:solidFill>
+                <a:latin typeface="Calibri"/>
+              </a:rPr>
+              <a:t>gap qualificacao: 11% negros vs 22% brancos — estavel em 10 anos</a:t>
+            </a:r>
+          </a:p>
+        </p:txBody>
+      </p:sp>
+      <p:sp>
+        <p:nvSpPr>
+          <p:cNvPr id="51" name="Rectangle 50"/>
           <p:cNvSpPr/>
           <p:nvPr/>
         </p:nvSpPr>
         <p:spPr>
           <a:xfrm>
-            <a:off x="4297679" y="3822191"/>
-            <a:ext cx="3657600" cy="27432"/>
+            <a:off x="274320" y="6309360"/>
+            <a:ext cx="11612880" cy="292608"/>
           </a:xfrm>
           <a:prstGeom prst="rect">
             <a:avLst/>
           </a:prstGeom>
           <a:solidFill>
-            <a:srgbClr val="616161"/>
+            <a:srgbClr val="FF8F00"/>
           </a:solidFill>
           <a:ln/>
         </p:spPr>
@@ -12194,61 +13436,57 @@
       </p:sp>
       <p:sp>
         <p:nvSpPr>
-          <p:cNvPr id="19" name="TextBox 18"/>
-          <p:cNvSpPr txBox="1"/>
-          <p:nvPr/>
-        </p:nvSpPr>
-        <p:spPr>
-          <a:xfrm>
-            <a:off x="4389119" y="3886200"/>
-            <a:ext cx="3474720" cy="1005840"/>
-          </a:xfrm>
-          <a:prstGeom prst="rect">
-            <a:avLst/>
-          </a:prstGeom>
-          <a:noFill/>
-        </p:spPr>
-        <p:txBody>
-          <a:bodyPr wrap="square">
-            <a:spAutoFit/>
-          </a:bodyPr>
-          <a:lstStyle/>
-          <a:p>
-            <a:pPr algn="l"/>
-            <a:r>
-              <a:rPr sz="1150" b="0" i="1">
-                <a:solidFill>
-                  <a:srgbClr val="616161"/>
-                </a:solidFill>
-                <a:latin typeface="Calibri"/>
-              </a:rPr>
-              <a:t>Uma variavel oculta teria que ser 2,3x mais preditiva que TODAS as observadas juntas</a:t>
-            </a:r>
-          </a:p>
-        </p:txBody>
-      </p:sp>
-      <p:sp>
-        <p:nvSpPr>
-          <p:cNvPr id="20" name="Rectangle 19"/>
+          <p:cNvPr id="52" name="TextBox 51"/>
+          <p:cNvSpPr txBox="1"/>
+          <p:nvPr/>
+        </p:nvSpPr>
+        <p:spPr>
+          <a:xfrm>
+            <a:off x="457200" y="6336793"/>
+            <a:ext cx="11247120" cy="256032"/>
+          </a:xfrm>
+          <a:prstGeom prst="rect">
+            <a:avLst/>
+          </a:prstGeom>
+          <a:noFill/>
+        </p:spPr>
+        <p:txBody>
+          <a:bodyPr wrap="square">
+            <a:spAutoFit/>
+          </a:bodyPr>
+          <a:lstStyle/>
+          <a:p>
+            <a:pPr algn="ctr"/>
+            <a:r>
+              <a:rPr sz="1100" b="1" i="0">
+                <a:solidFill>
+                  <a:srgbClr val="1F3864"/>
+                </a:solidFill>
+                <a:latin typeface="Calibri"/>
+              </a:rPr>
+              <a:t>Pareto: cotas (Eixo 1) + mentoria (Eixo 3) = combinacao otima. E focalizar o orcamento nas UFs de maior penalidade (DF, Norte) rende +68,2% vs. distribuicao uniforme.</a:t>
+            </a:r>
+          </a:p>
+        </p:txBody>
+      </p:sp>
+      <p:sp>
+        <p:nvSpPr>
+          <p:cNvPr id="53" name="Rectangle 52"/>
           <p:cNvSpPr/>
           <p:nvPr/>
         </p:nvSpPr>
         <p:spPr>
           <a:xfrm>
-            <a:off x="8229598" y="1508760"/>
-            <a:ext cx="3749039" cy="4434840"/>
+            <a:off x="0" y="6601968"/>
+            <a:ext cx="12188952" cy="256032"/>
           </a:xfrm>
           <a:prstGeom prst="rect">
             <a:avLst/>
           </a:prstGeom>
           <a:solidFill>
-            <a:srgbClr val="F5F5F5"/>
+            <a:srgbClr val="1F3864"/>
           </a:solidFill>
-          <a:ln w="25400">
-            <a:solidFill>
-              <a:srgbClr val="1565C0"/>
-            </a:solidFill>
-          </a:ln>
+          <a:ln/>
         </p:spPr>
         <p:style>
           <a:lnRef idx="1">
@@ -12274,347 +13512,7 @@
       </p:sp>
       <p:sp>
         <p:nvSpPr>
-          <p:cNvPr id="21" name="Rectangle 20"/>
-          <p:cNvSpPr/>
-          <p:nvPr/>
-        </p:nvSpPr>
-        <p:spPr>
-          <a:xfrm>
-            <a:off x="8229598" y="1508760"/>
-            <a:ext cx="3749039" cy="457200"/>
-          </a:xfrm>
-          <a:prstGeom prst="rect">
-            <a:avLst/>
-          </a:prstGeom>
-          <a:solidFill>
-            <a:srgbClr val="1565C0"/>
-          </a:solidFill>
-          <a:ln/>
-        </p:spPr>
-        <p:style>
-          <a:lnRef idx="1">
-            <a:schemeClr val="accent1"/>
-          </a:lnRef>
-          <a:fillRef idx="3">
-            <a:schemeClr val="accent1"/>
-          </a:fillRef>
-          <a:effectRef idx="2">
-            <a:schemeClr val="accent1"/>
-          </a:effectRef>
-          <a:fontRef idx="minor">
-            <a:schemeClr val="lt1"/>
-          </a:fontRef>
-        </p:style>
-        <p:txBody>
-          <a:bodyPr rtlCol="0" anchor="ctr"/>
-          <a:lstStyle/>
-          <a:p>
-            <a:pPr algn="ctr"/>
-          </a:p>
-        </p:txBody>
-      </p:sp>
-      <p:sp>
-        <p:nvSpPr>
-          <p:cNvPr id="22" name="TextBox 21"/>
-          <p:cNvSpPr txBox="1"/>
-          <p:nvPr/>
-        </p:nvSpPr>
-        <p:spPr>
-          <a:xfrm>
-            <a:off x="8366758" y="1545336"/>
-            <a:ext cx="3474720" cy="411480"/>
-          </a:xfrm>
-          <a:prstGeom prst="rect">
-            <a:avLst/>
-          </a:prstGeom>
-          <a:noFill/>
-        </p:spPr>
-        <p:txBody>
-          <a:bodyPr wrap="square">
-            <a:spAutoFit/>
-          </a:bodyPr>
-          <a:lstStyle/>
-          <a:p>
-            <a:pPr algn="l"/>
-            <a:r>
-              <a:rPr sz="1300" b="1" i="0">
-                <a:solidFill>
-                  <a:srgbClr val="FFFFFF"/>
-                </a:solidFill>
-                <a:latin typeface="Calibri"/>
-              </a:rPr>
-              <a:t>Oster Bounds (Oster, 2019)</a:t>
-            </a:r>
-          </a:p>
-        </p:txBody>
-      </p:sp>
-      <p:sp>
-        <p:nvSpPr>
-          <p:cNvPr id="23" name="TextBox 22"/>
-          <p:cNvSpPr txBox="1"/>
-          <p:nvPr/>
-        </p:nvSpPr>
-        <p:spPr>
-          <a:xfrm>
-            <a:off x="8366758" y="2084831"/>
-            <a:ext cx="3474720" cy="594360"/>
-          </a:xfrm>
-          <a:prstGeom prst="rect">
-            <a:avLst/>
-          </a:prstGeom>
-          <a:noFill/>
-        </p:spPr>
-        <p:txBody>
-          <a:bodyPr wrap="square">
-            <a:spAutoFit/>
-          </a:bodyPr>
-          <a:lstStyle/>
-          <a:p>
-            <a:pPr algn="ctr"/>
-            <a:r>
-              <a:rPr sz="2600" b="1" i="0">
-                <a:solidFill>
-                  <a:srgbClr val="1565C0"/>
-                </a:solidFill>
-                <a:latin typeface="Calibri"/>
-              </a:rPr>
-              <a:t>delta* negativo</a:t>
-            </a:r>
-          </a:p>
-        </p:txBody>
-      </p:sp>
-      <p:sp>
-        <p:nvSpPr>
-          <p:cNvPr id="24" name="TextBox 23"/>
-          <p:cNvSpPr txBox="1"/>
-          <p:nvPr/>
-        </p:nvSpPr>
-        <p:spPr>
-          <a:xfrm>
-            <a:off x="8366758" y="2743200"/>
-            <a:ext cx="3474720" cy="1005840"/>
-          </a:xfrm>
-          <a:prstGeom prst="rect">
-            <a:avLst/>
-          </a:prstGeom>
-          <a:noFill/>
-        </p:spPr>
-        <p:txBody>
-          <a:bodyPr wrap="square">
-            <a:spAutoFit/>
-          </a:bodyPr>
-          <a:lstStyle/>
-          <a:p>
-            <a:pPr algn="l"/>
-            <a:r>
-              <a:rPr sz="1300" b="0" i="0">
-                <a:solidFill>
-                  <a:srgbClr val="212121"/>
-                </a:solidFill>
-                <a:latin typeface="Calibri"/>
-              </a:rPr>
-              <a:t>variaveis omitidas teriam que agir na direcao OPOSTA as observadas</a:t>
-            </a:r>
-          </a:p>
-        </p:txBody>
-      </p:sp>
-      <p:sp>
-        <p:nvSpPr>
-          <p:cNvPr id="25" name="Rectangle 24"/>
-          <p:cNvSpPr/>
-          <p:nvPr/>
-        </p:nvSpPr>
-        <p:spPr>
-          <a:xfrm>
-            <a:off x="8275318" y="3822191"/>
-            <a:ext cx="3657600" cy="27432"/>
-          </a:xfrm>
-          <a:prstGeom prst="rect">
-            <a:avLst/>
-          </a:prstGeom>
-          <a:solidFill>
-            <a:srgbClr val="616161"/>
-          </a:solidFill>
-          <a:ln/>
-        </p:spPr>
-        <p:style>
-          <a:lnRef idx="1">
-            <a:schemeClr val="accent1"/>
-          </a:lnRef>
-          <a:fillRef idx="3">
-            <a:schemeClr val="accent1"/>
-          </a:fillRef>
-          <a:effectRef idx="2">
-            <a:schemeClr val="accent1"/>
-          </a:effectRef>
-          <a:fontRef idx="minor">
-            <a:schemeClr val="lt1"/>
-          </a:fontRef>
-        </p:style>
-        <p:txBody>
-          <a:bodyPr rtlCol="0" anchor="ctr"/>
-          <a:lstStyle/>
-          <a:p>
-            <a:pPr algn="ctr"/>
-          </a:p>
-        </p:txBody>
-      </p:sp>
-      <p:sp>
-        <p:nvSpPr>
-          <p:cNvPr id="26" name="TextBox 25"/>
-          <p:cNvSpPr txBox="1"/>
-          <p:nvPr/>
-        </p:nvSpPr>
-        <p:spPr>
-          <a:xfrm>
-            <a:off x="8366758" y="3886200"/>
-            <a:ext cx="3474720" cy="1005840"/>
-          </a:xfrm>
-          <a:prstGeom prst="rect">
-            <a:avLst/>
-          </a:prstGeom>
-          <a:noFill/>
-        </p:spPr>
-        <p:txBody>
-          <a:bodyPr wrap="square">
-            <a:spAutoFit/>
-          </a:bodyPr>
-          <a:lstStyle/>
-          <a:p>
-            <a:pPr algn="l"/>
-            <a:r>
-              <a:rPr sz="1150" b="0" i="1">
-                <a:solidFill>
-                  <a:srgbClr val="616161"/>
-                </a:solidFill>
-                <a:latin typeface="Calibri"/>
-              </a:rPr>
-              <a:t>Impossivel: estudos mostram que omitidas e observadas agem na mesma direcao</a:t>
-            </a:r>
-          </a:p>
-        </p:txBody>
-      </p:sp>
-      <p:sp>
-        <p:nvSpPr>
-          <p:cNvPr id="27" name="Rectangle 26"/>
-          <p:cNvSpPr/>
-          <p:nvPr/>
-        </p:nvSpPr>
-        <p:spPr>
-          <a:xfrm>
-            <a:off x="274320" y="6053328"/>
-            <a:ext cx="11612880" cy="530352"/>
-          </a:xfrm>
-          <a:prstGeom prst="rect">
-            <a:avLst/>
-          </a:prstGeom>
-          <a:solidFill>
-            <a:srgbClr val="1F3864"/>
-          </a:solidFill>
-          <a:ln/>
-        </p:spPr>
-        <p:style>
-          <a:lnRef idx="1">
-            <a:schemeClr val="accent1"/>
-          </a:lnRef>
-          <a:fillRef idx="3">
-            <a:schemeClr val="accent1"/>
-          </a:fillRef>
-          <a:effectRef idx="2">
-            <a:schemeClr val="accent1"/>
-          </a:effectRef>
-          <a:fontRef idx="minor">
-            <a:schemeClr val="lt1"/>
-          </a:fontRef>
-        </p:style>
-        <p:txBody>
-          <a:bodyPr rtlCol="0" anchor="ctr"/>
-          <a:lstStyle/>
-          <a:p>
-            <a:pPr algn="ctr"/>
-          </a:p>
-        </p:txBody>
-      </p:sp>
-      <p:sp>
-        <p:nvSpPr>
-          <p:cNvPr id="28" name="TextBox 27"/>
-          <p:cNvSpPr txBox="1"/>
-          <p:nvPr/>
-        </p:nvSpPr>
-        <p:spPr>
-          <a:xfrm>
-            <a:off x="457200" y="6099048"/>
-            <a:ext cx="11247120" cy="438912"/>
-          </a:xfrm>
-          <a:prstGeom prst="rect">
-            <a:avLst/>
-          </a:prstGeom>
-          <a:noFill/>
-        </p:spPr>
-        <p:txBody>
-          <a:bodyPr wrap="square">
-            <a:spAutoFit/>
-          </a:bodyPr>
-          <a:lstStyle/>
-          <a:p>
-            <a:pPr algn="ctr"/>
-            <a:r>
-              <a:rPr sz="1350" b="1" i="0">
-                <a:solidFill>
-                  <a:srgbClr val="FFFFFF"/>
-                </a:solidFill>
-                <a:latin typeface="Calibri"/>
-              </a:rPr>
-              <a:t>Veredicto: os tres metodos independentes concordam. O gap racial no mercado de trabalho brasileiro e real,
-robusto e nao pode ser explicado por variaveis ocultas plausíveis.</a:t>
-            </a:r>
-          </a:p>
-        </p:txBody>
-      </p:sp>
-      <p:sp>
-        <p:nvSpPr>
-          <p:cNvPr id="29" name="Rectangle 28"/>
-          <p:cNvSpPr/>
-          <p:nvPr/>
-        </p:nvSpPr>
-        <p:spPr>
-          <a:xfrm>
-            <a:off x="0" y="6601968"/>
-            <a:ext cx="12188952" cy="256032"/>
-          </a:xfrm>
-          <a:prstGeom prst="rect">
-            <a:avLst/>
-          </a:prstGeom>
-          <a:solidFill>
-            <a:srgbClr val="1F3864"/>
-          </a:solidFill>
-          <a:ln/>
-        </p:spPr>
-        <p:style>
-          <a:lnRef idx="1">
-            <a:schemeClr val="accent1"/>
-          </a:lnRef>
-          <a:fillRef idx="3">
-            <a:schemeClr val="accent1"/>
-          </a:fillRef>
-          <a:effectRef idx="2">
-            <a:schemeClr val="accent1"/>
-          </a:effectRef>
-          <a:fontRef idx="minor">
-            <a:schemeClr val="lt1"/>
-          </a:fontRef>
-        </p:style>
-        <p:txBody>
-          <a:bodyPr rtlCol="0" anchor="ctr"/>
-          <a:lstStyle/>
-          <a:p>
-            <a:pPr algn="ctr"/>
-          </a:p>
-        </p:txBody>
-      </p:sp>
-      <p:sp>
-        <p:nvSpPr>
-          <p:cNvPr id="30" name="TextBox 29"/>
+          <p:cNvPr id="54" name="TextBox 53"/>
           <p:cNvSpPr txBox="1"/>
           <p:nvPr/>
         </p:nvSpPr>
@@ -12649,7 +13547,7 @@
       </p:sp>
       <p:sp>
         <p:nvSpPr>
-          <p:cNvPr id="31" name="TextBox 30"/>
+          <p:cNvPr id="55" name="TextBox 54"/>
           <p:cNvSpPr txBox="1"/>
           <p:nvPr/>
         </p:nvSpPr>
@@ -12677,7 +13575,7 @@
                 </a:solidFill>
                 <a:latin typeface="Calibri"/>
               </a:rPr>
-              <a:t>8/11</a:t>
+              <a:t>9/11</a:t>
             </a:r>
           </a:p>
         </p:txBody>
@@ -12771,7 +13669,7 @@
                 </a:solidFill>
                 <a:latin typeface="Calibri"/>
               </a:rPr>
-              <a:t>8. O Que Fazer — Tres Eixos de Politica Publica</a:t>
+              <a:t>9. Interseccionalidade — O Teto de Vidro Recai sobre a Mulher Negra</a:t>
             </a:r>
           </a:p>
         </p:txBody>
@@ -12806,46 +13704,35 @@
                 </a:solidFill>
                 <a:latin typeface="Calibri"/>
               </a:rPr>
-              <a:t>TOPSIS + AHP + Programacao Linear — prioridade: atacar a porta de entrada, nao o salario</a:t>
-            </a:r>
-          </a:p>
-        </p:txBody>
-      </p:sp>
-      <p:sp>
-        <p:nvSpPr>
-          <p:cNvPr id="5" name="TextBox 4"/>
-          <p:cNvSpPr txBox="1"/>
-          <p:nvPr/>
-        </p:nvSpPr>
-        <p:spPr>
-          <a:xfrm>
-            <a:off x="365760" y="1005840"/>
-            <a:ext cx="11430000" cy="384048"/>
-          </a:xfrm>
-          <a:prstGeom prst="rect">
-            <a:avLst/>
-          </a:prstGeom>
-          <a:noFill/>
-        </p:spPr>
-        <p:txBody>
-          <a:bodyPr wrap="square">
-            <a:spAutoFit/>
-          </a:bodyPr>
-          <a:lstStyle/>
-          <a:p>
-            <a:pPr algn="l"/>
-            <a:r>
-              <a:rPr sz="1700" b="1" i="0">
-                <a:solidFill>
-                  <a:srgbClr val="1F3864"/>
-                </a:solidFill>
-                <a:latin typeface="Calibri"/>
-              </a:rPr>
-              <a:t>84% do gap e de ACESSO. As politicas precisam refletir isso.</a:t>
-            </a:r>
-          </a:p>
-        </p:txBody>
-      </p:sp>
+              <a:t>4 grupos raca x genero (ref. homem branco): alcada no acesso, a mais excluida no topo da renda</a:t>
+            </a:r>
+          </a:p>
+        </p:txBody>
+      </p:sp>
+      <p:pic>
+        <p:nvPicPr>
+          <p:cNvPr id="5" name="Picture 4" descr="grupo_rg_interseccional.png"/>
+          <p:cNvPicPr>
+            <a:picLocks noChangeAspect="1"/>
+          </p:cNvPicPr>
+          <p:nvPr/>
+        </p:nvPicPr>
+        <p:blipFill>
+          <a:blip r:embed="rId2"/>
+          <a:stretch>
+            <a:fillRect/>
+          </a:stretch>
+        </p:blipFill>
+        <p:spPr>
+          <a:xfrm>
+            <a:off x="365760" y="1188720"/>
+            <a:ext cx="6949440" cy="4595360"/>
+          </a:xfrm>
+          <a:prstGeom prst="rect">
+            <a:avLst/>
+          </a:prstGeom>
+        </p:spPr>
+      </p:pic>
       <p:sp>
         <p:nvSpPr>
           <p:cNvPr id="6" name="Rectangle 5"/>
@@ -12854,18 +13741,18 @@
         </p:nvSpPr>
         <p:spPr>
           <a:xfrm>
-            <a:off x="274320" y="1481328"/>
-            <a:ext cx="3749039" cy="5074920"/>
+            <a:off x="7589520" y="1371600"/>
+            <a:ext cx="4206240" cy="1645920"/>
           </a:xfrm>
           <a:prstGeom prst="rect">
             <a:avLst/>
           </a:prstGeom>
           <a:solidFill>
-            <a:srgbClr val="F5F5F5"/>
+            <a:srgbClr val="0D1F3C"/>
           </a:solidFill>
-          <a:ln w="25400">
+          <a:ln w="19050">
             <a:solidFill>
-              <a:srgbClr val="B71C1C"/>
+              <a:srgbClr val="FF8F00"/>
             </a:solidFill>
           </a:ln>
         </p:spPr>
@@ -12893,22 +13780,131 @@
       </p:sp>
       <p:sp>
         <p:nvSpPr>
-          <p:cNvPr id="7" name="Rectangle 6"/>
+          <p:cNvPr id="7" name="TextBox 6"/>
+          <p:cNvSpPr txBox="1"/>
+          <p:nvPr/>
+        </p:nvSpPr>
+        <p:spPr>
+          <a:xfrm>
+            <a:off x="7699248" y="1444752"/>
+            <a:ext cx="3986784" cy="347472"/>
+          </a:xfrm>
+          <a:prstGeom prst="rect">
+            <a:avLst/>
+          </a:prstGeom>
+          <a:noFill/>
+        </p:spPr>
+        <p:txBody>
+          <a:bodyPr wrap="square">
+            <a:spAutoFit/>
+          </a:bodyPr>
+          <a:lstStyle/>
+          <a:p>
+            <a:pPr algn="l"/>
+            <a:r>
+              <a:rPr sz="1200" b="0" i="0">
+                <a:solidFill>
+                  <a:srgbClr val="BBDEFB"/>
+                </a:solidFill>
+                <a:latin typeface="Calibri"/>
+              </a:rPr>
+              <a:t>Mulher negra — acesso (CBO 1-4)</a:t>
+            </a:r>
+          </a:p>
+        </p:txBody>
+      </p:sp>
+      <p:sp>
+        <p:nvSpPr>
+          <p:cNvPr id="8" name="TextBox 7"/>
+          <p:cNvSpPr txBox="1"/>
+          <p:nvPr/>
+        </p:nvSpPr>
+        <p:spPr>
+          <a:xfrm>
+            <a:off x="7699248" y="1755648"/>
+            <a:ext cx="3986784" cy="777240"/>
+          </a:xfrm>
+          <a:prstGeom prst="rect">
+            <a:avLst/>
+          </a:prstGeom>
+          <a:noFill/>
+        </p:spPr>
+        <p:txBody>
+          <a:bodyPr wrap="square">
+            <a:spAutoFit/>
+          </a:bodyPr>
+          <a:lstStyle/>
+          <a:p>
+            <a:pPr algn="ctr"/>
+            <a:r>
+              <a:rPr sz="3600" b="1" i="0">
+                <a:solidFill>
+                  <a:srgbClr val="1565C0"/>
+                </a:solidFill>
+                <a:latin typeface="Calibri"/>
+              </a:rPr>
+              <a:t>OR 1,33</a:t>
+            </a:r>
+          </a:p>
+        </p:txBody>
+      </p:sp>
+      <p:sp>
+        <p:nvSpPr>
+          <p:cNvPr id="9" name="TextBox 8"/>
+          <p:cNvSpPr txBox="1"/>
+          <p:nvPr/>
+        </p:nvSpPr>
+        <p:spPr>
+          <a:xfrm>
+            <a:off x="7699248" y="2560320"/>
+            <a:ext cx="3986784" cy="347472"/>
+          </a:xfrm>
+          <a:prstGeom prst="rect">
+            <a:avLst/>
+          </a:prstGeom>
+          <a:noFill/>
+        </p:spPr>
+        <p:txBody>
+          <a:bodyPr wrap="square">
+            <a:spAutoFit/>
+          </a:bodyPr>
+          <a:lstStyle/>
+          <a:p>
+            <a:pPr algn="l"/>
+            <a:r>
+              <a:rPr sz="1000" b="0" i="1">
+                <a:solidFill>
+                  <a:srgbClr val="616161"/>
+                </a:solidFill>
+                <a:latin typeface="Calibri"/>
+              </a:rPr>
+              <a:t>acima do homem branco (profissoes feminizadas)</a:t>
+            </a:r>
+          </a:p>
+        </p:txBody>
+      </p:sp>
+      <p:sp>
+        <p:nvSpPr>
+          <p:cNvPr id="10" name="Rectangle 9"/>
           <p:cNvSpPr/>
           <p:nvPr/>
         </p:nvSpPr>
         <p:spPr>
           <a:xfrm>
-            <a:off x="274320" y="1481328"/>
-            <a:ext cx="3749039" cy="457200"/>
+            <a:off x="7589520" y="3291840"/>
+            <a:ext cx="4206240" cy="1645920"/>
           </a:xfrm>
           <a:prstGeom prst="rect">
             <a:avLst/>
           </a:prstGeom>
           <a:solidFill>
-            <a:srgbClr val="B71C1C"/>
+            <a:srgbClr val="0D1F3C"/>
           </a:solidFill>
-          <a:ln/>
+          <a:ln w="19050">
+            <a:solidFill>
+              <a:srgbClr val="FF8F00"/>
+            </a:solidFill>
+          </a:ln>
         </p:spPr>
         <p:style>
           <a:lnRef idx="1">
@@ -12934,14 +13930,14 @@
       </p:sp>
       <p:sp>
         <p:nvSpPr>
-          <p:cNvPr id="8" name="TextBox 7"/>
-          <p:cNvSpPr txBox="1"/>
-          <p:nvPr/>
-        </p:nvSpPr>
-        <p:spPr>
-          <a:xfrm>
-            <a:off x="411480" y="1517904"/>
-            <a:ext cx="3474720" cy="411480"/>
+          <p:cNvPr id="11" name="TextBox 10"/>
+          <p:cNvSpPr txBox="1"/>
+          <p:nvPr/>
+        </p:nvSpPr>
+        <p:spPr>
+          <a:xfrm>
+            <a:off x="7699248" y="3364992"/>
+            <a:ext cx="3986784" cy="347472"/>
           </a:xfrm>
           <a:prstGeom prst="rect">
             <a:avLst/>
@@ -12956,37 +13952,107 @@
           <a:p>
             <a:pPr algn="l"/>
             <a:r>
-              <a:rPr sz="1400" b="1" i="0">
-                <a:solidFill>
-                  <a:srgbClr val="FFFFFF"/>
-                </a:solidFill>
-                <a:latin typeface="Calibri"/>
-              </a:rPr>
-              <a:t>#1 — Acesso</a:t>
-            </a:r>
-          </a:p>
-        </p:txBody>
-      </p:sp>
-      <p:sp>
-        <p:nvSpPr>
-          <p:cNvPr id="9" name="Rectangle 8"/>
+              <a:rPr sz="1200" b="0" i="0">
+                <a:solidFill>
+                  <a:srgbClr val="BBDEFB"/>
+                </a:solidFill>
+                <a:latin typeface="Calibri"/>
+              </a:rPr>
+              <a:t>Mulher negra — topo 10% renda</a:t>
+            </a:r>
+          </a:p>
+        </p:txBody>
+      </p:sp>
+      <p:sp>
+        <p:nvSpPr>
+          <p:cNvPr id="12" name="TextBox 11"/>
+          <p:cNvSpPr txBox="1"/>
+          <p:nvPr/>
+        </p:nvSpPr>
+        <p:spPr>
+          <a:xfrm>
+            <a:off x="7699248" y="3675888"/>
+            <a:ext cx="3986784" cy="777240"/>
+          </a:xfrm>
+          <a:prstGeom prst="rect">
+            <a:avLst/>
+          </a:prstGeom>
+          <a:noFill/>
+        </p:spPr>
+        <p:txBody>
+          <a:bodyPr wrap="square">
+            <a:spAutoFit/>
+          </a:bodyPr>
+          <a:lstStyle/>
+          <a:p>
+            <a:pPr algn="ctr"/>
+            <a:r>
+              <a:rPr sz="3600" b="1" i="0">
+                <a:solidFill>
+                  <a:srgbClr val="B71C1C"/>
+                </a:solidFill>
+                <a:latin typeface="Calibri"/>
+              </a:rPr>
+              <a:t>OR 0,34</a:t>
+            </a:r>
+          </a:p>
+        </p:txBody>
+      </p:sp>
+      <p:sp>
+        <p:nvSpPr>
+          <p:cNvPr id="13" name="TextBox 12"/>
+          <p:cNvSpPr txBox="1"/>
+          <p:nvPr/>
+        </p:nvSpPr>
+        <p:spPr>
+          <a:xfrm>
+            <a:off x="7699248" y="4480560"/>
+            <a:ext cx="3986784" cy="347472"/>
+          </a:xfrm>
+          <a:prstGeom prst="rect">
+            <a:avLst/>
+          </a:prstGeom>
+          <a:noFill/>
+        </p:spPr>
+        <p:txBody>
+          <a:bodyPr wrap="square">
+            <a:spAutoFit/>
+          </a:bodyPr>
+          <a:lstStyle/>
+          <a:p>
+            <a:pPr algn="l"/>
+            <a:r>
+              <a:rPr sz="1000" b="0" i="1">
+                <a:solidFill>
+                  <a:srgbClr val="616161"/>
+                </a:solidFill>
+                <a:latin typeface="Calibri"/>
+              </a:rPr>
+              <a:t>a MAIS excluida de todos os grupos</a:t>
+            </a:r>
+          </a:p>
+        </p:txBody>
+      </p:sp>
+      <p:sp>
+        <p:nvSpPr>
+          <p:cNvPr id="14" name="Rectangle 13"/>
           <p:cNvSpPr/>
           <p:nvPr/>
         </p:nvSpPr>
         <p:spPr>
           <a:xfrm>
-            <a:off x="411480" y="2029968"/>
-            <a:ext cx="3474720" cy="1325880"/>
+            <a:off x="365760" y="5897880"/>
+            <a:ext cx="11430000" cy="566928"/>
           </a:xfrm>
           <a:prstGeom prst="rect">
             <a:avLst/>
           </a:prstGeom>
           <a:solidFill>
-            <a:srgbClr val="FFFFFF"/>
+            <a:srgbClr val="E3F2FD"/>
           </a:solidFill>
-          <a:ln w="6350">
+          <a:ln w="10160">
             <a:solidFill>
-              <a:srgbClr val="B71C1C"/>
+              <a:srgbClr val="1F3864"/>
             </a:solidFill>
           </a:ln>
         </p:spPr>
@@ -13014,131 +14080,57 @@
       </p:sp>
       <p:sp>
         <p:nvSpPr>
-          <p:cNvPr id="10" name="TextBox 9"/>
-          <p:cNvSpPr txBox="1"/>
-          <p:nvPr/>
-        </p:nvSpPr>
-        <p:spPr>
-          <a:xfrm>
-            <a:off x="502920" y="2084832"/>
-            <a:ext cx="3291840" cy="384048"/>
-          </a:xfrm>
-          <a:prstGeom prst="rect">
-            <a:avLst/>
-          </a:prstGeom>
-          <a:noFill/>
-        </p:spPr>
-        <p:txBody>
-          <a:bodyPr wrap="square">
-            <a:spAutoFit/>
-          </a:bodyPr>
-          <a:lstStyle/>
-          <a:p>
-            <a:pPr algn="l"/>
-            <a:r>
-              <a:rPr sz="1250" b="1" i="0">
-                <a:solidFill>
-                  <a:srgbClr val="B71C1C"/>
-                </a:solidFill>
-                <a:latin typeface="Calibri"/>
-              </a:rPr>
-              <a:t>Cotas CBO (Dirigente/Profissional)</a:t>
-            </a:r>
-          </a:p>
-        </p:txBody>
-      </p:sp>
-      <p:sp>
-        <p:nvSpPr>
-          <p:cNvPr id="11" name="TextBox 10"/>
-          <p:cNvSpPr txBox="1"/>
-          <p:nvPr/>
-        </p:nvSpPr>
-        <p:spPr>
-          <a:xfrm>
-            <a:off x="502920" y="2468880"/>
-            <a:ext cx="3291840" cy="347472"/>
-          </a:xfrm>
-          <a:prstGeom prst="rect">
-            <a:avLst/>
-          </a:prstGeom>
-          <a:noFill/>
-        </p:spPr>
-        <p:txBody>
-          <a:bodyPr wrap="square">
-            <a:spAutoFit/>
-          </a:bodyPr>
-          <a:lstStyle/>
-          <a:p>
-            <a:pPr algn="l"/>
-            <a:r>
-              <a:rPr sz="1150" b="0" i="0">
-                <a:solidFill>
-                  <a:srgbClr val="212121"/>
-                </a:solidFill>
-                <a:latin typeface="Calibri"/>
-              </a:rPr>
-              <a:t>meta IR &gt;= 0,80 ate 2030</a:t>
-            </a:r>
-          </a:p>
-        </p:txBody>
-      </p:sp>
-      <p:sp>
-        <p:nvSpPr>
-          <p:cNvPr id="12" name="TextBox 11"/>
-          <p:cNvSpPr txBox="1"/>
-          <p:nvPr/>
-        </p:nvSpPr>
-        <p:spPr>
-          <a:xfrm>
-            <a:off x="502920" y="2834640"/>
-            <a:ext cx="3291840" cy="384048"/>
-          </a:xfrm>
-          <a:prstGeom prst="rect">
-            <a:avLst/>
-          </a:prstGeom>
-          <a:noFill/>
-        </p:spPr>
-        <p:txBody>
-          <a:bodyPr wrap="square">
-            <a:spAutoFit/>
-          </a:bodyPr>
-          <a:lstStyle/>
-          <a:p>
-            <a:pPr algn="l"/>
-            <a:r>
-              <a:rPr sz="1050" b="0" i="1">
-                <a:solidFill>
-                  <a:srgbClr val="616161"/>
-                </a:solidFill>
-                <a:latin typeface="Calibri"/>
-              </a:rPr>
-              <a:t>TOPSIS CC=0,834 — 2,1x superior ao 2o colocado</a:t>
-            </a:r>
-          </a:p>
-        </p:txBody>
-      </p:sp>
-      <p:sp>
-        <p:nvSpPr>
-          <p:cNvPr id="13" name="Rectangle 12"/>
+          <p:cNvPr id="15" name="TextBox 14"/>
+          <p:cNvSpPr txBox="1"/>
+          <p:nvPr/>
+        </p:nvSpPr>
+        <p:spPr>
+          <a:xfrm>
+            <a:off x="548640" y="5943600"/>
+            <a:ext cx="11064240" cy="475488"/>
+          </a:xfrm>
+          <a:prstGeom prst="rect">
+            <a:avLst/>
+          </a:prstGeom>
+          <a:noFill/>
+        </p:spPr>
+        <p:txBody>
+          <a:bodyPr wrap="square">
+            <a:spAutoFit/>
+          </a:bodyPr>
+          <a:lstStyle/>
+          <a:p>
+            <a:pPr algn="ctr"/>
+            <a:r>
+              <a:rPr sz="1200" b="1" i="0">
+                <a:solidFill>
+                  <a:srgbClr val="1F3864"/>
+                </a:solidFill>
+                <a:latin typeface="Calibri"/>
+              </a:rPr>
+              <a:t>A mulher negra pode ENTRAR em ocupacoes qualificadas, mas e barrada de CHEGAR AO TOPO da remuneracao: o teto de vidro nao e racial nem sexualmente neutro — combina os dois eixos onde mais importa.</a:t>
+            </a:r>
+          </a:p>
+        </p:txBody>
+      </p:sp>
+      <p:sp>
+        <p:nvSpPr>
+          <p:cNvPr id="16" name="Rectangle 15"/>
           <p:cNvSpPr/>
           <p:nvPr/>
         </p:nvSpPr>
         <p:spPr>
           <a:xfrm>
-            <a:off x="411480" y="3493008"/>
-            <a:ext cx="3474720" cy="1325880"/>
+            <a:off x="0" y="6601968"/>
+            <a:ext cx="12188952" cy="256032"/>
           </a:xfrm>
           <a:prstGeom prst="rect">
             <a:avLst/>
           </a:prstGeom>
           <a:solidFill>
-            <a:srgbClr val="FFFFFF"/>
+            <a:srgbClr val="1F3864"/>
           </a:solidFill>
-          <a:ln w="6350">
-            <a:solidFill>
-              <a:srgbClr val="B71C1C"/>
-            </a:solidFill>
-          </a:ln>
+          <a:ln/>
         </p:spPr>
         <p:style>
           <a:lnRef idx="1">
@@ -13164,1521 +14156,7 @@
       </p:sp>
       <p:sp>
         <p:nvSpPr>
-          <p:cNvPr id="14" name="TextBox 13"/>
-          <p:cNvSpPr txBox="1"/>
-          <p:nvPr/>
-        </p:nvSpPr>
-        <p:spPr>
-          <a:xfrm>
-            <a:off x="502920" y="3547872"/>
-            <a:ext cx="3291840" cy="384048"/>
-          </a:xfrm>
-          <a:prstGeom prst="rect">
-            <a:avLst/>
-          </a:prstGeom>
-          <a:noFill/>
-        </p:spPr>
-        <p:txBody>
-          <a:bodyPr wrap="square">
-            <a:spAutoFit/>
-          </a:bodyPr>
-          <a:lstStyle/>
-          <a:p>
-            <a:pPr algn="l"/>
-            <a:r>
-              <a:rPr sz="1250" b="1" i="0">
-                <a:solidFill>
-                  <a:srgbClr val="B71C1C"/>
-                </a:solidFill>
-                <a:latin typeface="Calibri"/>
-              </a:rPr>
-              <a:t>PRONATEC c/ recorte racial</a:t>
-            </a:r>
-          </a:p>
-        </p:txBody>
-      </p:sp>
-      <p:sp>
-        <p:nvSpPr>
-          <p:cNvPr id="15" name="TextBox 14"/>
-          <p:cNvSpPr txBox="1"/>
-          <p:nvPr/>
-        </p:nvSpPr>
-        <p:spPr>
-          <a:xfrm>
-            <a:off x="502920" y="3931920"/>
-            <a:ext cx="3291840" cy="347472"/>
-          </a:xfrm>
-          <a:prstGeom prst="rect">
-            <a:avLst/>
-          </a:prstGeom>
-          <a:noFill/>
-        </p:spPr>
-        <p:txBody>
-          <a:bodyPr wrap="square">
-            <a:spAutoFit/>
-          </a:bodyPr>
-          <a:lstStyle/>
-          <a:p>
-            <a:pPr algn="l"/>
-            <a:r>
-              <a:rPr sz="1150" b="0" i="0">
-                <a:solidFill>
-                  <a:srgbClr val="212121"/>
-                </a:solidFill>
-                <a:latin typeface="Calibri"/>
-              </a:rPr>
-              <a:t>subsidio de transporte em UPAs pobres</a:t>
-            </a:r>
-          </a:p>
-        </p:txBody>
-      </p:sp>
-      <p:sp>
-        <p:nvSpPr>
-          <p:cNvPr id="16" name="TextBox 15"/>
-          <p:cNvSpPr txBox="1"/>
-          <p:nvPr/>
-        </p:nvSpPr>
-        <p:spPr>
-          <a:xfrm>
-            <a:off x="502920" y="4297680"/>
-            <a:ext cx="3291840" cy="384048"/>
-          </a:xfrm>
-          <a:prstGeom prst="rect">
-            <a:avLst/>
-          </a:prstGeom>
-          <a:noFill/>
-        </p:spPr>
-        <p:txBody>
-          <a:bodyPr wrap="square">
-            <a:spAutoFit/>
-          </a:bodyPr>
-          <a:lstStyle/>
-          <a:p>
-            <a:pPr algn="l"/>
-            <a:r>
-              <a:rPr sz="1050" b="0" i="1">
-                <a:solidFill>
-                  <a:srgbClr val="616161"/>
-                </a:solidFill>
-                <a:latin typeface="Calibri"/>
-              </a:rPr>
-              <a:t>ataca segregacao residencial (52% do gap)</a:t>
-            </a:r>
-          </a:p>
-        </p:txBody>
-      </p:sp>
-      <p:sp>
-        <p:nvSpPr>
-          <p:cNvPr id="17" name="Rectangle 16"/>
-          <p:cNvSpPr/>
-          <p:nvPr/>
-        </p:nvSpPr>
-        <p:spPr>
-          <a:xfrm>
-            <a:off x="411480" y="4956048"/>
-            <a:ext cx="3474720" cy="1325880"/>
-          </a:xfrm>
-          <a:prstGeom prst="rect">
-            <a:avLst/>
-          </a:prstGeom>
-          <a:solidFill>
-            <a:srgbClr val="FFFFFF"/>
-          </a:solidFill>
-          <a:ln w="6350">
-            <a:solidFill>
-              <a:srgbClr val="B71C1C"/>
-            </a:solidFill>
-          </a:ln>
-        </p:spPr>
-        <p:style>
-          <a:lnRef idx="1">
-            <a:schemeClr val="accent1"/>
-          </a:lnRef>
-          <a:fillRef idx="3">
-            <a:schemeClr val="accent1"/>
-          </a:fillRef>
-          <a:effectRef idx="2">
-            <a:schemeClr val="accent1"/>
-          </a:effectRef>
-          <a:fontRef idx="minor">
-            <a:schemeClr val="lt1"/>
-          </a:fontRef>
-        </p:style>
-        <p:txBody>
-          <a:bodyPr rtlCol="0" anchor="ctr"/>
-          <a:lstStyle/>
-          <a:p>
-            <a:pPr algn="ctr"/>
-          </a:p>
-        </p:txBody>
-      </p:sp>
-      <p:sp>
-        <p:nvSpPr>
-          <p:cNvPr id="18" name="TextBox 17"/>
-          <p:cNvSpPr txBox="1"/>
-          <p:nvPr/>
-        </p:nvSpPr>
-        <p:spPr>
-          <a:xfrm>
-            <a:off x="502920" y="5010912"/>
-            <a:ext cx="3291840" cy="384048"/>
-          </a:xfrm>
-          <a:prstGeom prst="rect">
-            <a:avLst/>
-          </a:prstGeom>
-          <a:noFill/>
-        </p:spPr>
-        <p:txBody>
-          <a:bodyPr wrap="square">
-            <a:spAutoFit/>
-          </a:bodyPr>
-          <a:lstStyle/>
-          <a:p>
-            <a:pPr algn="l"/>
-            <a:r>
-              <a:rPr sz="1250" b="1" i="0">
-                <a:solidFill>
-                  <a:srgbClr val="B71C1C"/>
-                </a:solidFill>
-                <a:latin typeface="Calibri"/>
-              </a:rPr>
-              <a:t>Residencias em empresas de alta renda</a:t>
-            </a:r>
-          </a:p>
-        </p:txBody>
-      </p:sp>
-      <p:sp>
-        <p:nvSpPr>
-          <p:cNvPr id="19" name="TextBox 18"/>
-          <p:cNvSpPr txBox="1"/>
-          <p:nvPr/>
-        </p:nvSpPr>
-        <p:spPr>
-          <a:xfrm>
-            <a:off x="502920" y="5394960"/>
-            <a:ext cx="3291840" cy="347472"/>
-          </a:xfrm>
-          <a:prstGeom prst="rect">
-            <a:avLst/>
-          </a:prstGeom>
-          <a:noFill/>
-        </p:spPr>
-        <p:txBody>
-          <a:bodyPr wrap="square">
-            <a:spAutoFit/>
-          </a:bodyPr>
-          <a:lstStyle/>
-          <a:p>
-            <a:pPr algn="l"/>
-            <a:r>
-              <a:rPr sz="1150" b="0" i="0">
-                <a:solidFill>
-                  <a:srgbClr val="212121"/>
-                </a:solidFill>
-                <a:latin typeface="Calibri"/>
-              </a:rPr>
-              <a:t>bolsas para egressos negros</a:t>
-            </a:r>
-          </a:p>
-        </p:txBody>
-      </p:sp>
-      <p:sp>
-        <p:nvSpPr>
-          <p:cNvPr id="20" name="TextBox 19"/>
-          <p:cNvSpPr txBox="1"/>
-          <p:nvPr/>
-        </p:nvSpPr>
-        <p:spPr>
-          <a:xfrm>
-            <a:off x="502920" y="5760720"/>
-            <a:ext cx="3291840" cy="384048"/>
-          </a:xfrm>
-          <a:prstGeom prst="rect">
-            <a:avLst/>
-          </a:prstGeom>
-          <a:noFill/>
-        </p:spPr>
-        <p:txBody>
-          <a:bodyPr wrap="square">
-            <a:spAutoFit/>
-          </a:bodyPr>
-          <a:lstStyle/>
-          <a:p>
-            <a:pPr algn="l"/>
-            <a:r>
-              <a:rPr sz="1050" b="0" i="1">
-                <a:solidFill>
-                  <a:srgbClr val="616161"/>
-                </a:solidFill>
-                <a:latin typeface="Calibri"/>
-              </a:rPr>
-              <a:t>quebra a barreira de redes (betweenness=0)</a:t>
-            </a:r>
-          </a:p>
-        </p:txBody>
-      </p:sp>
-      <p:sp>
-        <p:nvSpPr>
-          <p:cNvPr id="21" name="Rectangle 20"/>
-          <p:cNvSpPr/>
-          <p:nvPr/>
-        </p:nvSpPr>
-        <p:spPr>
-          <a:xfrm>
-            <a:off x="4251959" y="1481328"/>
-            <a:ext cx="3749039" cy="5074920"/>
-          </a:xfrm>
-          <a:prstGeom prst="rect">
-            <a:avLst/>
-          </a:prstGeom>
-          <a:solidFill>
-            <a:srgbClr val="F5F5F5"/>
-          </a:solidFill>
-          <a:ln w="25400">
-            <a:solidFill>
-              <a:srgbClr val="1565C0"/>
-            </a:solidFill>
-          </a:ln>
-        </p:spPr>
-        <p:style>
-          <a:lnRef idx="1">
-            <a:schemeClr val="accent1"/>
-          </a:lnRef>
-          <a:fillRef idx="3">
-            <a:schemeClr val="accent1"/>
-          </a:fillRef>
-          <a:effectRef idx="2">
-            <a:schemeClr val="accent1"/>
-          </a:effectRef>
-          <a:fontRef idx="minor">
-            <a:schemeClr val="lt1"/>
-          </a:fontRef>
-        </p:style>
-        <p:txBody>
-          <a:bodyPr rtlCol="0" anchor="ctr"/>
-          <a:lstStyle/>
-          <a:p>
-            <a:pPr algn="ctr"/>
-          </a:p>
-        </p:txBody>
-      </p:sp>
-      <p:sp>
-        <p:nvSpPr>
-          <p:cNvPr id="22" name="Rectangle 21"/>
-          <p:cNvSpPr/>
-          <p:nvPr/>
-        </p:nvSpPr>
-        <p:spPr>
-          <a:xfrm>
-            <a:off x="4251959" y="1481328"/>
-            <a:ext cx="3749039" cy="457200"/>
-          </a:xfrm>
-          <a:prstGeom prst="rect">
-            <a:avLst/>
-          </a:prstGeom>
-          <a:solidFill>
-            <a:srgbClr val="1565C0"/>
-          </a:solidFill>
-          <a:ln/>
-        </p:spPr>
-        <p:style>
-          <a:lnRef idx="1">
-            <a:schemeClr val="accent1"/>
-          </a:lnRef>
-          <a:fillRef idx="3">
-            <a:schemeClr val="accent1"/>
-          </a:fillRef>
-          <a:effectRef idx="2">
-            <a:schemeClr val="accent1"/>
-          </a:effectRef>
-          <a:fontRef idx="minor">
-            <a:schemeClr val="lt1"/>
-          </a:fontRef>
-        </p:style>
-        <p:txBody>
-          <a:bodyPr rtlCol="0" anchor="ctr"/>
-          <a:lstStyle/>
-          <a:p>
-            <a:pPr algn="ctr"/>
-          </a:p>
-        </p:txBody>
-      </p:sp>
-      <p:sp>
-        <p:nvSpPr>
-          <p:cNvPr id="23" name="TextBox 22"/>
-          <p:cNvSpPr txBox="1"/>
-          <p:nvPr/>
-        </p:nvSpPr>
-        <p:spPr>
-          <a:xfrm>
-            <a:off x="4389119" y="1517904"/>
-            <a:ext cx="3474720" cy="411480"/>
-          </a:xfrm>
-          <a:prstGeom prst="rect">
-            <a:avLst/>
-          </a:prstGeom>
-          <a:noFill/>
-        </p:spPr>
-        <p:txBody>
-          <a:bodyPr wrap="square">
-            <a:spAutoFit/>
-          </a:bodyPr>
-          <a:lstStyle/>
-          <a:p>
-            <a:pPr algn="l"/>
-            <a:r>
-              <a:rPr sz="1400" b="1" i="0">
-                <a:solidFill>
-                  <a:srgbClr val="FFFFFF"/>
-                </a:solidFill>
-                <a:latin typeface="Calibri"/>
-              </a:rPr>
-              <a:t>#2 — Remuneracao</a:t>
-            </a:r>
-          </a:p>
-        </p:txBody>
-      </p:sp>
-      <p:sp>
-        <p:nvSpPr>
-          <p:cNvPr id="24" name="Rectangle 23"/>
-          <p:cNvSpPr/>
-          <p:nvPr/>
-        </p:nvSpPr>
-        <p:spPr>
-          <a:xfrm>
-            <a:off x="4389119" y="2029968"/>
-            <a:ext cx="3474720" cy="1325880"/>
-          </a:xfrm>
-          <a:prstGeom prst="rect">
-            <a:avLst/>
-          </a:prstGeom>
-          <a:solidFill>
-            <a:srgbClr val="FFFFFF"/>
-          </a:solidFill>
-          <a:ln w="6350">
-            <a:solidFill>
-              <a:srgbClr val="1565C0"/>
-            </a:solidFill>
-          </a:ln>
-        </p:spPr>
-        <p:style>
-          <a:lnRef idx="1">
-            <a:schemeClr val="accent1"/>
-          </a:lnRef>
-          <a:fillRef idx="3">
-            <a:schemeClr val="accent1"/>
-          </a:fillRef>
-          <a:effectRef idx="2">
-            <a:schemeClr val="accent1"/>
-          </a:effectRef>
-          <a:fontRef idx="minor">
-            <a:schemeClr val="lt1"/>
-          </a:fontRef>
-        </p:style>
-        <p:txBody>
-          <a:bodyPr rtlCol="0" anchor="ctr"/>
-          <a:lstStyle/>
-          <a:p>
-            <a:pPr algn="ctr"/>
-          </a:p>
-        </p:txBody>
-      </p:sp>
-      <p:sp>
-        <p:nvSpPr>
-          <p:cNvPr id="25" name="TextBox 24"/>
-          <p:cNvSpPr txBox="1"/>
-          <p:nvPr/>
-        </p:nvSpPr>
-        <p:spPr>
-          <a:xfrm>
-            <a:off x="4480559" y="2084832"/>
-            <a:ext cx="3291840" cy="384048"/>
-          </a:xfrm>
-          <a:prstGeom prst="rect">
-            <a:avLst/>
-          </a:prstGeom>
-          <a:noFill/>
-        </p:spPr>
-        <p:txBody>
-          <a:bodyPr wrap="square">
-            <a:spAutoFit/>
-          </a:bodyPr>
-          <a:lstStyle/>
-          <a:p>
-            <a:pPr algn="l"/>
-            <a:r>
-              <a:rPr sz="1250" b="1" i="0">
-                <a:solidFill>
-                  <a:srgbClr val="1565C0"/>
-                </a:solidFill>
-                <a:latin typeface="Calibri"/>
-              </a:rPr>
-              <a:t>Transparencia salarial por raca/genero</a:t>
-            </a:r>
-          </a:p>
-        </p:txBody>
-      </p:sp>
-      <p:sp>
-        <p:nvSpPr>
-          <p:cNvPr id="26" name="TextBox 25"/>
-          <p:cNvSpPr txBox="1"/>
-          <p:nvPr/>
-        </p:nvSpPr>
-        <p:spPr>
-          <a:xfrm>
-            <a:off x="4480559" y="2468880"/>
-            <a:ext cx="3291840" cy="347472"/>
-          </a:xfrm>
-          <a:prstGeom prst="rect">
-            <a:avLst/>
-          </a:prstGeom>
-          <a:noFill/>
-        </p:spPr>
-        <p:txBody>
-          <a:bodyPr wrap="square">
-            <a:spAutoFit/>
-          </a:bodyPr>
-          <a:lstStyle/>
-          <a:p>
-            <a:pPr algn="l"/>
-            <a:r>
-              <a:rPr sz="1150" b="0" i="0">
-                <a:solidFill>
-                  <a:srgbClr val="212121"/>
-                </a:solidFill>
-                <a:latin typeface="Calibri"/>
-              </a:rPr>
-              <a:t>obrigatoria para empresas &gt;100 func.</a:t>
-            </a:r>
-          </a:p>
-        </p:txBody>
-      </p:sp>
-      <p:sp>
-        <p:nvSpPr>
-          <p:cNvPr id="27" name="TextBox 26"/>
-          <p:cNvSpPr txBox="1"/>
-          <p:nvPr/>
-        </p:nvSpPr>
-        <p:spPr>
-          <a:xfrm>
-            <a:off x="4480559" y="2834640"/>
-            <a:ext cx="3291840" cy="384048"/>
-          </a:xfrm>
-          <a:prstGeom prst="rect">
-            <a:avLst/>
-          </a:prstGeom>
-          <a:noFill/>
-        </p:spPr>
-        <p:txBody>
-          <a:bodyPr wrap="square">
-            <a:spAutoFit/>
-          </a:bodyPr>
-          <a:lstStyle/>
-          <a:p>
-            <a:pPr algn="l"/>
-            <a:r>
-              <a:rPr sz="1050" b="0" i="1">
-                <a:solidFill>
-                  <a:srgbClr val="616161"/>
-                </a:solidFill>
-                <a:latin typeface="Calibri"/>
-              </a:rPr>
-              <a:t>visa o gap residual de 6,2% (HLM M4)</a:t>
-            </a:r>
-          </a:p>
-        </p:txBody>
-      </p:sp>
-      <p:sp>
-        <p:nvSpPr>
-          <p:cNvPr id="28" name="Rectangle 27"/>
-          <p:cNvSpPr/>
-          <p:nvPr/>
-        </p:nvSpPr>
-        <p:spPr>
-          <a:xfrm>
-            <a:off x="4389119" y="3493008"/>
-            <a:ext cx="3474720" cy="1325880"/>
-          </a:xfrm>
-          <a:prstGeom prst="rect">
-            <a:avLst/>
-          </a:prstGeom>
-          <a:solidFill>
-            <a:srgbClr val="FFFFFF"/>
-          </a:solidFill>
-          <a:ln w="6350">
-            <a:solidFill>
-              <a:srgbClr val="1565C0"/>
-            </a:solidFill>
-          </a:ln>
-        </p:spPr>
-        <p:style>
-          <a:lnRef idx="1">
-            <a:schemeClr val="accent1"/>
-          </a:lnRef>
-          <a:fillRef idx="3">
-            <a:schemeClr val="accent1"/>
-          </a:fillRef>
-          <a:effectRef idx="2">
-            <a:schemeClr val="accent1"/>
-          </a:effectRef>
-          <a:fontRef idx="minor">
-            <a:schemeClr val="lt1"/>
-          </a:fontRef>
-        </p:style>
-        <p:txBody>
-          <a:bodyPr rtlCol="0" anchor="ctr"/>
-          <a:lstStyle/>
-          <a:p>
-            <a:pPr algn="ctr"/>
-          </a:p>
-        </p:txBody>
-      </p:sp>
-      <p:sp>
-        <p:nvSpPr>
-          <p:cNvPr id="29" name="TextBox 28"/>
-          <p:cNvSpPr txBox="1"/>
-          <p:nvPr/>
-        </p:nvSpPr>
-        <p:spPr>
-          <a:xfrm>
-            <a:off x="4480559" y="3547872"/>
-            <a:ext cx="3291840" cy="384048"/>
-          </a:xfrm>
-          <a:prstGeom prst="rect">
-            <a:avLst/>
-          </a:prstGeom>
-          <a:noFill/>
-        </p:spPr>
-        <p:txBody>
-          <a:bodyPr wrap="square">
-            <a:spAutoFit/>
-          </a:bodyPr>
-          <a:lstStyle/>
-          <a:p>
-            <a:pPr algn="l"/>
-            <a:r>
-              <a:rPr sz="1250" b="1" i="0">
-                <a:solidFill>
-                  <a:srgbClr val="1565C0"/>
-                </a:solidFill>
-                <a:latin typeface="Calibri"/>
-              </a:rPr>
-              <a:t>Auditoria de igual pagamento</a:t>
-            </a:r>
-          </a:p>
-        </p:txBody>
-      </p:sp>
-      <p:sp>
-        <p:nvSpPr>
-          <p:cNvPr id="30" name="TextBox 29"/>
-          <p:cNvSpPr txBox="1"/>
-          <p:nvPr/>
-        </p:nvSpPr>
-        <p:spPr>
-          <a:xfrm>
-            <a:off x="4480559" y="3931920"/>
-            <a:ext cx="3291840" cy="347472"/>
-          </a:xfrm>
-          <a:prstGeom prst="rect">
-            <a:avLst/>
-          </a:prstGeom>
-          <a:noFill/>
-        </p:spPr>
-        <p:txBody>
-          <a:bodyPr wrap="square">
-            <a:spAutoFit/>
-          </a:bodyPr>
-          <a:lstStyle/>
-          <a:p>
-            <a:pPr algn="l"/>
-            <a:r>
-              <a:rPr sz="1150" b="0" i="0">
-                <a:solidFill>
-                  <a:srgbClr val="212121"/>
-                </a:solidFill>
-                <a:latin typeface="Calibri"/>
-              </a:rPr>
-              <a:t>penalidades progressivas</a:t>
-            </a:r>
-          </a:p>
-        </p:txBody>
-      </p:sp>
-      <p:sp>
-        <p:nvSpPr>
-          <p:cNvPr id="31" name="TextBox 30"/>
-          <p:cNvSpPr txBox="1"/>
-          <p:nvPr/>
-        </p:nvSpPr>
-        <p:spPr>
-          <a:xfrm>
-            <a:off x="4480559" y="4297680"/>
-            <a:ext cx="3291840" cy="384048"/>
-          </a:xfrm>
-          <a:prstGeom prst="rect">
-            <a:avLst/>
-          </a:prstGeom>
-          <a:noFill/>
-        </p:spPr>
-        <p:txBody>
-          <a:bodyPr wrap="square">
-            <a:spAutoFit/>
-          </a:bodyPr>
-          <a:lstStyle/>
-          <a:p>
-            <a:pPr algn="l"/>
-            <a:r>
-              <a:rPr sz="1050" b="0" i="1">
-                <a:solidFill>
-                  <a:srgbClr val="616161"/>
-                </a:solidFill>
-                <a:latin typeface="Calibri"/>
-              </a:rPr>
-              <a:t>enforcement direto do sticky floor (q10=33%)</a:t>
-            </a:r>
-          </a:p>
-        </p:txBody>
-      </p:sp>
-      <p:sp>
-        <p:nvSpPr>
-          <p:cNvPr id="32" name="Rectangle 31"/>
-          <p:cNvSpPr/>
-          <p:nvPr/>
-        </p:nvSpPr>
-        <p:spPr>
-          <a:xfrm>
-            <a:off x="4389119" y="4956048"/>
-            <a:ext cx="3474720" cy="1325880"/>
-          </a:xfrm>
-          <a:prstGeom prst="rect">
-            <a:avLst/>
-          </a:prstGeom>
-          <a:solidFill>
-            <a:srgbClr val="FFFFFF"/>
-          </a:solidFill>
-          <a:ln w="6350">
-            <a:solidFill>
-              <a:srgbClr val="1565C0"/>
-            </a:solidFill>
-          </a:ln>
-        </p:spPr>
-        <p:style>
-          <a:lnRef idx="1">
-            <a:schemeClr val="accent1"/>
-          </a:lnRef>
-          <a:fillRef idx="3">
-            <a:schemeClr val="accent1"/>
-          </a:fillRef>
-          <a:effectRef idx="2">
-            <a:schemeClr val="accent1"/>
-          </a:effectRef>
-          <a:fontRef idx="minor">
-            <a:schemeClr val="lt1"/>
-          </a:fontRef>
-        </p:style>
-        <p:txBody>
-          <a:bodyPr rtlCol="0" anchor="ctr"/>
-          <a:lstStyle/>
-          <a:p>
-            <a:pPr algn="ctr"/>
-          </a:p>
-        </p:txBody>
-      </p:sp>
-      <p:sp>
-        <p:nvSpPr>
-          <p:cNvPr id="33" name="TextBox 32"/>
-          <p:cNvSpPr txBox="1"/>
-          <p:nvPr/>
-        </p:nvSpPr>
-        <p:spPr>
-          <a:xfrm>
-            <a:off x="4480559" y="5010912"/>
-            <a:ext cx="3291840" cy="384048"/>
-          </a:xfrm>
-          <a:prstGeom prst="rect">
-            <a:avLst/>
-          </a:prstGeom>
-          <a:noFill/>
-        </p:spPr>
-        <p:txBody>
-          <a:bodyPr wrap="square">
-            <a:spAutoFit/>
-          </a:bodyPr>
-          <a:lstStyle/>
-          <a:p>
-            <a:pPr algn="l"/>
-            <a:r>
-              <a:rPr sz="1250" b="1" i="0">
-                <a:solidFill>
-                  <a:srgbClr val="1565C0"/>
-                </a:solidFill>
-                <a:latin typeface="Calibri"/>
-              </a:rPr>
-              <a:t>Piso salarial nas categorias de maior gap</a:t>
-            </a:r>
-          </a:p>
-        </p:txBody>
-      </p:sp>
-      <p:sp>
-        <p:nvSpPr>
-          <p:cNvPr id="34" name="TextBox 33"/>
-          <p:cNvSpPr txBox="1"/>
-          <p:nvPr/>
-        </p:nvSpPr>
-        <p:spPr>
-          <a:xfrm>
-            <a:off x="4480559" y="5394960"/>
-            <a:ext cx="3291840" cy="347472"/>
-          </a:xfrm>
-          <a:prstGeom prst="rect">
-            <a:avLst/>
-          </a:prstGeom>
-          <a:noFill/>
-        </p:spPr>
-        <p:txBody>
-          <a:bodyPr wrap="square">
-            <a:spAutoFit/>
-          </a:bodyPr>
-          <a:lstStyle/>
-          <a:p>
-            <a:pPr algn="l"/>
-            <a:r>
-              <a:rPr sz="1150" b="0" i="0">
-                <a:solidFill>
-                  <a:srgbClr val="212121"/>
-                </a:solidFill>
-                <a:latin typeface="Calibri"/>
-              </a:rPr>
-              <a:t>indexado ao gap HLM M4</a:t>
-            </a:r>
-          </a:p>
-        </p:txBody>
-      </p:sp>
-      <p:sp>
-        <p:nvSpPr>
-          <p:cNvPr id="35" name="TextBox 34"/>
-          <p:cNvSpPr txBox="1"/>
-          <p:nvPr/>
-        </p:nvSpPr>
-        <p:spPr>
-          <a:xfrm>
-            <a:off x="4480559" y="5760720"/>
-            <a:ext cx="3291840" cy="384048"/>
-          </a:xfrm>
-          <a:prstGeom prst="rect">
-            <a:avLst/>
-          </a:prstGeom>
-          <a:noFill/>
-        </p:spPr>
-        <p:txBody>
-          <a:bodyPr wrap="square">
-            <a:spAutoFit/>
-          </a:bodyPr>
-          <a:lstStyle/>
-          <a:p>
-            <a:pPr algn="l"/>
-            <a:r>
-              <a:rPr sz="1050" b="0" i="1">
-                <a:solidFill>
-                  <a:srgbClr val="616161"/>
-                </a:solidFill>
-                <a:latin typeface="Calibri"/>
-              </a:rPr>
-              <a:t>protecao prioritaria para trabalhadores da base</a:t>
-            </a:r>
-          </a:p>
-        </p:txBody>
-      </p:sp>
-      <p:sp>
-        <p:nvSpPr>
-          <p:cNvPr id="36" name="Rectangle 35"/>
-          <p:cNvSpPr/>
-          <p:nvPr/>
-        </p:nvSpPr>
-        <p:spPr>
-          <a:xfrm>
-            <a:off x="8229598" y="1481328"/>
-            <a:ext cx="3749039" cy="5074920"/>
-          </a:xfrm>
-          <a:prstGeom prst="rect">
-            <a:avLst/>
-          </a:prstGeom>
-          <a:solidFill>
-            <a:srgbClr val="F5F5F5"/>
-          </a:solidFill>
-          <a:ln w="25400">
-            <a:solidFill>
-              <a:srgbClr val="1F3864"/>
-            </a:solidFill>
-          </a:ln>
-        </p:spPr>
-        <p:style>
-          <a:lnRef idx="1">
-            <a:schemeClr val="accent1"/>
-          </a:lnRef>
-          <a:fillRef idx="3">
-            <a:schemeClr val="accent1"/>
-          </a:fillRef>
-          <a:effectRef idx="2">
-            <a:schemeClr val="accent1"/>
-          </a:effectRef>
-          <a:fontRef idx="minor">
-            <a:schemeClr val="lt1"/>
-          </a:fontRef>
-        </p:style>
-        <p:txBody>
-          <a:bodyPr rtlCol="0" anchor="ctr"/>
-          <a:lstStyle/>
-          <a:p>
-            <a:pPr algn="ctr"/>
-          </a:p>
-        </p:txBody>
-      </p:sp>
-      <p:sp>
-        <p:nvSpPr>
-          <p:cNvPr id="37" name="Rectangle 36"/>
-          <p:cNvSpPr/>
-          <p:nvPr/>
-        </p:nvSpPr>
-        <p:spPr>
-          <a:xfrm>
-            <a:off x="8229598" y="1481328"/>
-            <a:ext cx="3749039" cy="457200"/>
-          </a:xfrm>
-          <a:prstGeom prst="rect">
-            <a:avLst/>
-          </a:prstGeom>
-          <a:solidFill>
-            <a:srgbClr val="1F3864"/>
-          </a:solidFill>
-          <a:ln/>
-        </p:spPr>
-        <p:style>
-          <a:lnRef idx="1">
-            <a:schemeClr val="accent1"/>
-          </a:lnRef>
-          <a:fillRef idx="3">
-            <a:schemeClr val="accent1"/>
-          </a:fillRef>
-          <a:effectRef idx="2">
-            <a:schemeClr val="accent1"/>
-          </a:effectRef>
-          <a:fontRef idx="minor">
-            <a:schemeClr val="lt1"/>
-          </a:fontRef>
-        </p:style>
-        <p:txBody>
-          <a:bodyPr rtlCol="0" anchor="ctr"/>
-          <a:lstStyle/>
-          <a:p>
-            <a:pPr algn="ctr"/>
-          </a:p>
-        </p:txBody>
-      </p:sp>
-      <p:sp>
-        <p:nvSpPr>
-          <p:cNvPr id="38" name="TextBox 37"/>
-          <p:cNvSpPr txBox="1"/>
-          <p:nvPr/>
-        </p:nvSpPr>
-        <p:spPr>
-          <a:xfrm>
-            <a:off x="8366758" y="1517904"/>
-            <a:ext cx="3474720" cy="411480"/>
-          </a:xfrm>
-          <a:prstGeom prst="rect">
-            <a:avLst/>
-          </a:prstGeom>
-          <a:noFill/>
-        </p:spPr>
-        <p:txBody>
-          <a:bodyPr wrap="square">
-            <a:spAutoFit/>
-          </a:bodyPr>
-          <a:lstStyle/>
-          <a:p>
-            <a:pPr algn="l"/>
-            <a:r>
-              <a:rPr sz="1400" b="1" i="0">
-                <a:solidFill>
-                  <a:srgbClr val="FFFFFF"/>
-                </a:solidFill>
-                <a:latin typeface="Calibri"/>
-              </a:rPr>
-              <a:t>#3 — Redes</a:t>
-            </a:r>
-          </a:p>
-        </p:txBody>
-      </p:sp>
-      <p:sp>
-        <p:nvSpPr>
-          <p:cNvPr id="39" name="Rectangle 38"/>
-          <p:cNvSpPr/>
-          <p:nvPr/>
-        </p:nvSpPr>
-        <p:spPr>
-          <a:xfrm>
-            <a:off x="8366758" y="2029968"/>
-            <a:ext cx="3474720" cy="1325880"/>
-          </a:xfrm>
-          <a:prstGeom prst="rect">
-            <a:avLst/>
-          </a:prstGeom>
-          <a:solidFill>
-            <a:srgbClr val="FFFFFF"/>
-          </a:solidFill>
-          <a:ln w="6350">
-            <a:solidFill>
-              <a:srgbClr val="1F3864"/>
-            </a:solidFill>
-          </a:ln>
-        </p:spPr>
-        <p:style>
-          <a:lnRef idx="1">
-            <a:schemeClr val="accent1"/>
-          </a:lnRef>
-          <a:fillRef idx="3">
-            <a:schemeClr val="accent1"/>
-          </a:fillRef>
-          <a:effectRef idx="2">
-            <a:schemeClr val="accent1"/>
-          </a:effectRef>
-          <a:fontRef idx="minor">
-            <a:schemeClr val="lt1"/>
-          </a:fontRef>
-        </p:style>
-        <p:txBody>
-          <a:bodyPr rtlCol="0" anchor="ctr"/>
-          <a:lstStyle/>
-          <a:p>
-            <a:pPr algn="ctr"/>
-          </a:p>
-        </p:txBody>
-      </p:sp>
-      <p:sp>
-        <p:nvSpPr>
-          <p:cNvPr id="40" name="TextBox 39"/>
-          <p:cNvSpPr txBox="1"/>
-          <p:nvPr/>
-        </p:nvSpPr>
-        <p:spPr>
-          <a:xfrm>
-            <a:off x="8458198" y="2084832"/>
-            <a:ext cx="3291840" cy="384048"/>
-          </a:xfrm>
-          <a:prstGeom prst="rect">
-            <a:avLst/>
-          </a:prstGeom>
-          <a:noFill/>
-        </p:spPr>
-        <p:txBody>
-          <a:bodyPr wrap="square">
-            <a:spAutoFit/>
-          </a:bodyPr>
-          <a:lstStyle/>
-          <a:p>
-            <a:pPr algn="l"/>
-            <a:r>
-              <a:rPr sz="1250" b="1" i="0">
-                <a:solidFill>
-                  <a:srgbClr val="1F3864"/>
-                </a:solidFill>
-                <a:latin typeface="Calibri"/>
-              </a:rPr>
-              <a:t>Mentoria estruturada por empresas</a:t>
-            </a:r>
-          </a:p>
-        </p:txBody>
-      </p:sp>
-      <p:sp>
-        <p:nvSpPr>
-          <p:cNvPr id="41" name="TextBox 40"/>
-          <p:cNvSpPr txBox="1"/>
-          <p:nvPr/>
-        </p:nvSpPr>
-        <p:spPr>
-          <a:xfrm>
-            <a:off x="8458198" y="2468880"/>
-            <a:ext cx="3291840" cy="347472"/>
-          </a:xfrm>
-          <a:prstGeom prst="rect">
-            <a:avLst/>
-          </a:prstGeom>
-          <a:noFill/>
-        </p:spPr>
-        <p:txBody>
-          <a:bodyPr wrap="square">
-            <a:spAutoFit/>
-          </a:bodyPr>
-          <a:lstStyle/>
-          <a:p>
-            <a:pPr algn="l"/>
-            <a:r>
-              <a:rPr sz="1150" b="0" i="0">
-                <a:solidFill>
-                  <a:srgbClr val="212121"/>
-                </a:solidFill>
-                <a:latin typeface="Calibri"/>
-              </a:rPr>
-              <a:t>elevacao da betweenness centrality</a:t>
-            </a:r>
-          </a:p>
-        </p:txBody>
-      </p:sp>
-      <p:sp>
-        <p:nvSpPr>
-          <p:cNvPr id="42" name="TextBox 41"/>
-          <p:cNvSpPr txBox="1"/>
-          <p:nvPr/>
-        </p:nvSpPr>
-        <p:spPr>
-          <a:xfrm>
-            <a:off x="8458198" y="2834640"/>
-            <a:ext cx="3291840" cy="384048"/>
-          </a:xfrm>
-          <a:prstGeom prst="rect">
-            <a:avLst/>
-          </a:prstGeom>
-          <a:noFill/>
-        </p:spPr>
-        <p:txBody>
-          <a:bodyPr wrap="square">
-            <a:spAutoFit/>
-          </a:bodyPr>
-          <a:lstStyle/>
-          <a:p>
-            <a:pPr algn="l"/>
-            <a:r>
-              <a:rPr sz="1050" b="0" i="1">
-                <a:solidFill>
-                  <a:srgbClr val="616161"/>
-                </a:solidFill>
-                <a:latin typeface="Calibri"/>
-              </a:rPr>
-              <a:t>SNA: betweenness=0 anula retorno ao diploma</a:t>
-            </a:r>
-          </a:p>
-        </p:txBody>
-      </p:sp>
-      <p:sp>
-        <p:nvSpPr>
-          <p:cNvPr id="43" name="Rectangle 42"/>
-          <p:cNvSpPr/>
-          <p:nvPr/>
-        </p:nvSpPr>
-        <p:spPr>
-          <a:xfrm>
-            <a:off x="8366758" y="3493008"/>
-            <a:ext cx="3474720" cy="1325880"/>
-          </a:xfrm>
-          <a:prstGeom prst="rect">
-            <a:avLst/>
-          </a:prstGeom>
-          <a:solidFill>
-            <a:srgbClr val="FFFFFF"/>
-          </a:solidFill>
-          <a:ln w="6350">
-            <a:solidFill>
-              <a:srgbClr val="1F3864"/>
-            </a:solidFill>
-          </a:ln>
-        </p:spPr>
-        <p:style>
-          <a:lnRef idx="1">
-            <a:schemeClr val="accent1"/>
-          </a:lnRef>
-          <a:fillRef idx="3">
-            <a:schemeClr val="accent1"/>
-          </a:fillRef>
-          <a:effectRef idx="2">
-            <a:schemeClr val="accent1"/>
-          </a:effectRef>
-          <a:fontRef idx="minor">
-            <a:schemeClr val="lt1"/>
-          </a:fontRef>
-        </p:style>
-        <p:txBody>
-          <a:bodyPr rtlCol="0" anchor="ctr"/>
-          <a:lstStyle/>
-          <a:p>
-            <a:pPr algn="ctr"/>
-          </a:p>
-        </p:txBody>
-      </p:sp>
-      <p:sp>
-        <p:nvSpPr>
-          <p:cNvPr id="44" name="TextBox 43"/>
-          <p:cNvSpPr txBox="1"/>
-          <p:nvPr/>
-        </p:nvSpPr>
-        <p:spPr>
-          <a:xfrm>
-            <a:off x="8458198" y="3547872"/>
-            <a:ext cx="3291840" cy="384048"/>
-          </a:xfrm>
-          <a:prstGeom prst="rect">
-            <a:avLst/>
-          </a:prstGeom>
-          <a:noFill/>
-        </p:spPr>
-        <p:txBody>
-          <a:bodyPr wrap="square">
-            <a:spAutoFit/>
-          </a:bodyPr>
-          <a:lstStyle/>
-          <a:p>
-            <a:pPr algn="l"/>
-            <a:r>
-              <a:rPr sz="1250" b="1" i="0">
-                <a:solidFill>
-                  <a:srgbClr val="1F3864"/>
-                </a:solidFill>
-                <a:latin typeface="Calibri"/>
-              </a:rPr>
-              <a:t>30% DAS e liderancas corporativas</a:t>
-            </a:r>
-          </a:p>
-        </p:txBody>
-      </p:sp>
-      <p:sp>
-        <p:nvSpPr>
-          <p:cNvPr id="45" name="TextBox 44"/>
-          <p:cNvSpPr txBox="1"/>
-          <p:nvPr/>
-        </p:nvSpPr>
-        <p:spPr>
-          <a:xfrm>
-            <a:off x="8458198" y="3931920"/>
-            <a:ext cx="3291840" cy="347472"/>
-          </a:xfrm>
-          <a:prstGeom prst="rect">
-            <a:avLst/>
-          </a:prstGeom>
-          <a:noFill/>
-        </p:spPr>
-        <p:txBody>
-          <a:bodyPr wrap="square">
-            <a:spAutoFit/>
-          </a:bodyPr>
-          <a:lstStyle/>
-          <a:p>
-            <a:pPr algn="l"/>
-            <a:r>
-              <a:rPr sz="1150" b="0" i="0">
-                <a:solidFill>
-                  <a:srgbClr val="212121"/>
-                </a:solidFill>
-                <a:latin typeface="Calibri"/>
-              </a:rPr>
-              <a:t>reserva para negros ate 2030</a:t>
-            </a:r>
-          </a:p>
-        </p:txBody>
-      </p:sp>
-      <p:sp>
-        <p:nvSpPr>
-          <p:cNvPr id="46" name="TextBox 45"/>
-          <p:cNvSpPr txBox="1"/>
-          <p:nvPr/>
-        </p:nvSpPr>
-        <p:spPr>
-          <a:xfrm>
-            <a:off x="8458198" y="4297680"/>
-            <a:ext cx="3291840" cy="384048"/>
-          </a:xfrm>
-          <a:prstGeom prst="rect">
-            <a:avLst/>
-          </a:prstGeom>
-          <a:noFill/>
-        </p:spPr>
-        <p:txBody>
-          <a:bodyPr wrap="square">
-            <a:spAutoFit/>
-          </a:bodyPr>
-          <a:lstStyle/>
-          <a:p>
-            <a:pPr algn="l"/>
-            <a:r>
-              <a:rPr sz="1050" b="0" i="1">
-                <a:solidFill>
-                  <a:srgbClr val="616161"/>
-                </a:solidFill>
-                <a:latin typeface="Calibri"/>
-              </a:rPr>
-              <a:t>inclusao nas redes de decisao (glass ceiling)</a:t>
-            </a:r>
-          </a:p>
-        </p:txBody>
-      </p:sp>
-      <p:sp>
-        <p:nvSpPr>
-          <p:cNvPr id="47" name="Rectangle 46"/>
-          <p:cNvSpPr/>
-          <p:nvPr/>
-        </p:nvSpPr>
-        <p:spPr>
-          <a:xfrm>
-            <a:off x="8366758" y="4956048"/>
-            <a:ext cx="3474720" cy="1325880"/>
-          </a:xfrm>
-          <a:prstGeom prst="rect">
-            <a:avLst/>
-          </a:prstGeom>
-          <a:solidFill>
-            <a:srgbClr val="FFFFFF"/>
-          </a:solidFill>
-          <a:ln w="6350">
-            <a:solidFill>
-              <a:srgbClr val="1F3864"/>
-            </a:solidFill>
-          </a:ln>
-        </p:spPr>
-        <p:style>
-          <a:lnRef idx="1">
-            <a:schemeClr val="accent1"/>
-          </a:lnRef>
-          <a:fillRef idx="3">
-            <a:schemeClr val="accent1"/>
-          </a:fillRef>
-          <a:effectRef idx="2">
-            <a:schemeClr val="accent1"/>
-          </a:effectRef>
-          <a:fontRef idx="minor">
-            <a:schemeClr val="lt1"/>
-          </a:fontRef>
-        </p:style>
-        <p:txBody>
-          <a:bodyPr rtlCol="0" anchor="ctr"/>
-          <a:lstStyle/>
-          <a:p>
-            <a:pPr algn="ctr"/>
-          </a:p>
-        </p:txBody>
-      </p:sp>
-      <p:sp>
-        <p:nvSpPr>
-          <p:cNvPr id="48" name="TextBox 47"/>
-          <p:cNvSpPr txBox="1"/>
-          <p:nvPr/>
-        </p:nvSpPr>
-        <p:spPr>
-          <a:xfrm>
-            <a:off x="8458198" y="5010912"/>
-            <a:ext cx="3291840" cy="384048"/>
-          </a:xfrm>
-          <a:prstGeom prst="rect">
-            <a:avLst/>
-          </a:prstGeom>
-          <a:noFill/>
-        </p:spPr>
-        <p:txBody>
-          <a:bodyPr wrap="square">
-            <a:spAutoFit/>
-          </a:bodyPr>
-          <a:lstStyle/>
-          <a:p>
-            <a:pPr algn="l"/>
-            <a:r>
-              <a:rPr sz="1250" b="1" i="0">
-                <a:solidFill>
-                  <a:srgbClr val="1F3864"/>
-                </a:solidFill>
-                <a:latin typeface="Calibri"/>
-              </a:rPr>
-              <a:t>Equidade educacional de qualidade</a:t>
-            </a:r>
-          </a:p>
-        </p:txBody>
-      </p:sp>
-      <p:sp>
-        <p:nvSpPr>
-          <p:cNvPr id="49" name="TextBox 48"/>
-          <p:cNvSpPr txBox="1"/>
-          <p:nvPr/>
-        </p:nvSpPr>
-        <p:spPr>
-          <a:xfrm>
-            <a:off x="8458198" y="5394960"/>
-            <a:ext cx="3291840" cy="347472"/>
-          </a:xfrm>
-          <a:prstGeom prst="rect">
-            <a:avLst/>
-          </a:prstGeom>
-          <a:noFill/>
-        </p:spPr>
-        <p:txBody>
-          <a:bodyPr wrap="square">
-            <a:spAutoFit/>
-          </a:bodyPr>
-          <a:lstStyle/>
-          <a:p>
-            <a:pPr algn="l"/>
-            <a:r>
-              <a:rPr sz="1150" b="0" i="0">
-                <a:solidFill>
-                  <a:srgbClr val="212121"/>
-                </a:solidFill>
-                <a:latin typeface="Calibri"/>
-              </a:rPr>
-              <a:t>nao apenas de acesso</a:t>
-            </a:r>
-          </a:p>
-        </p:txBody>
-      </p:sp>
-      <p:sp>
-        <p:nvSpPr>
-          <p:cNvPr id="50" name="TextBox 49"/>
-          <p:cNvSpPr txBox="1"/>
-          <p:nvPr/>
-        </p:nvSpPr>
-        <p:spPr>
-          <a:xfrm>
-            <a:off x="8458198" y="5760720"/>
-            <a:ext cx="3291840" cy="384048"/>
-          </a:xfrm>
-          <a:prstGeom prst="rect">
-            <a:avLst/>
-          </a:prstGeom>
-          <a:noFill/>
-        </p:spPr>
-        <p:txBody>
-          <a:bodyPr wrap="square">
-            <a:spAutoFit/>
-          </a:bodyPr>
-          <a:lstStyle/>
-          <a:p>
-            <a:pPr algn="l"/>
-            <a:r>
-              <a:rPr sz="1050" b="0" i="1">
-                <a:solidFill>
-                  <a:srgbClr val="616161"/>
-                </a:solidFill>
-                <a:latin typeface="Calibri"/>
-              </a:rPr>
-              <a:t>gap qualificacao: 11% negros vs 22% brancos — estavel em 10 anos</a:t>
-            </a:r>
-          </a:p>
-        </p:txBody>
-      </p:sp>
-      <p:sp>
-        <p:nvSpPr>
-          <p:cNvPr id="51" name="Rectangle 50"/>
-          <p:cNvSpPr/>
-          <p:nvPr/>
-        </p:nvSpPr>
-        <p:spPr>
-          <a:xfrm>
-            <a:off x="274320" y="6309360"/>
-            <a:ext cx="11612880" cy="292608"/>
-          </a:xfrm>
-          <a:prstGeom prst="rect">
-            <a:avLst/>
-          </a:prstGeom>
-          <a:solidFill>
-            <a:srgbClr val="FF8F00"/>
-          </a:solidFill>
-          <a:ln/>
-        </p:spPr>
-        <p:style>
-          <a:lnRef idx="1">
-            <a:schemeClr val="accent1"/>
-          </a:lnRef>
-          <a:fillRef idx="3">
-            <a:schemeClr val="accent1"/>
-          </a:fillRef>
-          <a:effectRef idx="2">
-            <a:schemeClr val="accent1"/>
-          </a:effectRef>
-          <a:fontRef idx="minor">
-            <a:schemeClr val="lt1"/>
-          </a:fontRef>
-        </p:style>
-        <p:txBody>
-          <a:bodyPr rtlCol="0" anchor="ctr"/>
-          <a:lstStyle/>
-          <a:p>
-            <a:pPr algn="ctr"/>
-          </a:p>
-        </p:txBody>
-      </p:sp>
-      <p:sp>
-        <p:nvSpPr>
-          <p:cNvPr id="52" name="TextBox 51"/>
-          <p:cNvSpPr txBox="1"/>
-          <p:nvPr/>
-        </p:nvSpPr>
-        <p:spPr>
-          <a:xfrm>
-            <a:off x="457200" y="6336793"/>
-            <a:ext cx="11247120" cy="256032"/>
-          </a:xfrm>
-          <a:prstGeom prst="rect">
-            <a:avLst/>
-          </a:prstGeom>
-          <a:noFill/>
-        </p:spPr>
-        <p:txBody>
-          <a:bodyPr wrap="square">
-            <a:spAutoFit/>
-          </a:bodyPr>
-          <a:lstStyle/>
-          <a:p>
-            <a:pPr algn="ctr"/>
-            <a:r>
-              <a:rPr sz="1100" b="1" i="0">
-                <a:solidFill>
-                  <a:srgbClr val="1F3864"/>
-                </a:solidFill>
-                <a:latin typeface="Calibri"/>
-              </a:rPr>
-              <a:t>Pareto: cotas (Eixo 1) + mentoria (Eixo 3) = combinacao otima. E focalizar o orcamento nas UFs de maior penalidade (DF, Norte) rende +68,2% vs. distribuicao uniforme.</a:t>
-            </a:r>
-          </a:p>
-        </p:txBody>
-      </p:sp>
-      <p:sp>
-        <p:nvSpPr>
-          <p:cNvPr id="53" name="Rectangle 52"/>
-          <p:cNvSpPr/>
-          <p:nvPr/>
-        </p:nvSpPr>
-        <p:spPr>
-          <a:xfrm>
-            <a:off x="0" y="6601968"/>
-            <a:ext cx="12188952" cy="256032"/>
-          </a:xfrm>
-          <a:prstGeom prst="rect">
-            <a:avLst/>
-          </a:prstGeom>
-          <a:solidFill>
-            <a:srgbClr val="1F3864"/>
-          </a:solidFill>
-          <a:ln/>
-        </p:spPr>
-        <p:style>
-          <a:lnRef idx="1">
-            <a:schemeClr val="accent1"/>
-          </a:lnRef>
-          <a:fillRef idx="3">
-            <a:schemeClr val="accent1"/>
-          </a:fillRef>
-          <a:effectRef idx="2">
-            <a:schemeClr val="accent1"/>
-          </a:effectRef>
-          <a:fontRef idx="minor">
-            <a:schemeClr val="lt1"/>
-          </a:fontRef>
-        </p:style>
-        <p:txBody>
-          <a:bodyPr rtlCol="0" anchor="ctr"/>
-          <a:lstStyle/>
-          <a:p>
-            <a:pPr algn="ctr"/>
-          </a:p>
-        </p:txBody>
-      </p:sp>
-      <p:sp>
-        <p:nvSpPr>
-          <p:cNvPr id="54" name="TextBox 53"/>
+          <p:cNvPr id="17" name="TextBox 16"/>
           <p:cNvSpPr txBox="1"/>
           <p:nvPr/>
         </p:nvSpPr>
@@ -14713,7 +14191,7 @@
       </p:sp>
       <p:sp>
         <p:nvSpPr>
-          <p:cNvPr id="55" name="TextBox 54"/>
+          <p:cNvPr id="18" name="TextBox 17"/>
           <p:cNvSpPr txBox="1"/>
           <p:nvPr/>
         </p:nvSpPr>
@@ -14741,7 +14219,7 @@
                 </a:solidFill>
                 <a:latin typeface="Calibri"/>
               </a:rPr>
-              <a:t>9/11</a:t>
+              <a:t>10/11</a:t>
             </a:r>
           </a:p>
         </p:txBody>
